--- a/GOAT_results.pptx
+++ b/GOAT_results.pptx
@@ -10,6 +10,17 @@
     <p:sldId id="258" r:id="rId4"/>
     <p:sldId id="259" r:id="rId5"/>
     <p:sldId id="260" r:id="rId6"/>
+    <p:sldId id="271" r:id="rId7"/>
+    <p:sldId id="261" r:id="rId8"/>
+    <p:sldId id="263" r:id="rId9"/>
+    <p:sldId id="262" r:id="rId10"/>
+    <p:sldId id="264" r:id="rId11"/>
+    <p:sldId id="265" r:id="rId12"/>
+    <p:sldId id="267" r:id="rId13"/>
+    <p:sldId id="269" r:id="rId14"/>
+    <p:sldId id="268" r:id="rId15"/>
+    <p:sldId id="270" r:id="rId16"/>
+    <p:sldId id="272" r:id="rId17"/>
   </p:sldIdLst>
   <p:sldSz cx="12192000" cy="6858000"/>
   <p:notesSz cx="6858000" cy="9144000"/>
@@ -108,6 +119,11 @@
       </a:defRPr>
     </a:lvl9pPr>
   </p:defaultTextStyle>
+  <p:extLst>
+    <p:ext uri="{EFAFB233-063F-42B5-8137-9DF3F51BA10A}">
+      <p15:sldGuideLst xmlns:p15="http://schemas.microsoft.com/office/powerpoint/2012/main"/>
+    </p:ext>
+  </p:extLst>
 </p:presentation>
 </file>
 
@@ -266,7 +282,7 @@
           <a:p>
             <a:fld id="{64BCE1A1-FC00-7748-946D-DD80348E0E7A}" type="datetimeFigureOut">
               <a:rPr lang="en-GB" smtClean="0"/>
-              <a:t>13/03/2026</a:t>
+              <a:t>05/04/2026</a:t>
             </a:fld>
             <a:endParaRPr lang="en-GB"/>
           </a:p>
@@ -436,7 +452,7 @@
           <a:p>
             <a:fld id="{64BCE1A1-FC00-7748-946D-DD80348E0E7A}" type="datetimeFigureOut">
               <a:rPr lang="en-GB" smtClean="0"/>
-              <a:t>13/03/2026</a:t>
+              <a:t>05/04/2026</a:t>
             </a:fld>
             <a:endParaRPr lang="en-GB"/>
           </a:p>
@@ -616,7 +632,7 @@
           <a:p>
             <a:fld id="{64BCE1A1-FC00-7748-946D-DD80348E0E7A}" type="datetimeFigureOut">
               <a:rPr lang="en-GB" smtClean="0"/>
-              <a:t>13/03/2026</a:t>
+              <a:t>05/04/2026</a:t>
             </a:fld>
             <a:endParaRPr lang="en-GB"/>
           </a:p>
@@ -786,7 +802,7 @@
           <a:p>
             <a:fld id="{64BCE1A1-FC00-7748-946D-DD80348E0E7A}" type="datetimeFigureOut">
               <a:rPr lang="en-GB" smtClean="0"/>
-              <a:t>13/03/2026</a:t>
+              <a:t>05/04/2026</a:t>
             </a:fld>
             <a:endParaRPr lang="en-GB"/>
           </a:p>
@@ -1046,7 +1062,7 @@
           <a:p>
             <a:fld id="{64BCE1A1-FC00-7748-946D-DD80348E0E7A}" type="datetimeFigureOut">
               <a:rPr lang="en-GB" smtClean="0"/>
-              <a:t>13/03/2026</a:t>
+              <a:t>05/04/2026</a:t>
             </a:fld>
             <a:endParaRPr lang="en-GB"/>
           </a:p>
@@ -1278,7 +1294,7 @@
           <a:p>
             <a:fld id="{64BCE1A1-FC00-7748-946D-DD80348E0E7A}" type="datetimeFigureOut">
               <a:rPr lang="en-GB" smtClean="0"/>
-              <a:t>13/03/2026</a:t>
+              <a:t>05/04/2026</a:t>
             </a:fld>
             <a:endParaRPr lang="en-GB"/>
           </a:p>
@@ -1633,7 +1649,7 @@
           <a:p>
             <a:fld id="{64BCE1A1-FC00-7748-946D-DD80348E0E7A}" type="datetimeFigureOut">
               <a:rPr lang="en-GB" smtClean="0"/>
-              <a:t>13/03/2026</a:t>
+              <a:t>05/04/2026</a:t>
             </a:fld>
             <a:endParaRPr lang="en-GB"/>
           </a:p>
@@ -1774,7 +1790,7 @@
           <a:p>
             <a:fld id="{64BCE1A1-FC00-7748-946D-DD80348E0E7A}" type="datetimeFigureOut">
               <a:rPr lang="en-GB" smtClean="0"/>
-              <a:t>13/03/2026</a:t>
+              <a:t>05/04/2026</a:t>
             </a:fld>
             <a:endParaRPr lang="en-GB"/>
           </a:p>
@@ -1869,7 +1885,7 @@
           <a:p>
             <a:fld id="{64BCE1A1-FC00-7748-946D-DD80348E0E7A}" type="datetimeFigureOut">
               <a:rPr lang="en-GB" smtClean="0"/>
-              <a:t>13/03/2026</a:t>
+              <a:t>05/04/2026</a:t>
             </a:fld>
             <a:endParaRPr lang="en-GB"/>
           </a:p>
@@ -2226,7 +2242,7 @@
           <a:p>
             <a:fld id="{64BCE1A1-FC00-7748-946D-DD80348E0E7A}" type="datetimeFigureOut">
               <a:rPr lang="en-GB" smtClean="0"/>
-              <a:t>13/03/2026</a:t>
+              <a:t>05/04/2026</a:t>
             </a:fld>
             <a:endParaRPr lang="en-GB"/>
           </a:p>
@@ -2544,7 +2560,7 @@
           <a:p>
             <a:fld id="{64BCE1A1-FC00-7748-946D-DD80348E0E7A}" type="datetimeFigureOut">
               <a:rPr lang="en-GB" smtClean="0"/>
-              <a:t>13/03/2026</a:t>
+              <a:t>05/04/2026</a:t>
             </a:fld>
             <a:endParaRPr lang="en-GB"/>
           </a:p>
@@ -2789,7 +2805,7 @@
           <a:p>
             <a:fld id="{64BCE1A1-FC00-7748-946D-DD80348E0E7A}" type="datetimeFigureOut">
               <a:rPr lang="en-GB" smtClean="0"/>
-              <a:t>13/03/2026</a:t>
+              <a:t>05/04/2026</a:t>
             </a:fld>
             <a:endParaRPr lang="en-GB"/>
           </a:p>
@@ -3365,6 +3381,1236 @@
 </p:sld>
 </file>
 
+<file path=ppt/slides/slide10.xml><?xml version="1.0" encoding="utf-8"?>
+<p:sld xmlns:a="http://schemas.openxmlformats.org/drawingml/2006/main" xmlns:r="http://schemas.openxmlformats.org/officeDocument/2006/relationships" xmlns:p="http://schemas.openxmlformats.org/presentationml/2006/main">
+  <p:cSld>
+    <p:spTree>
+      <p:nvGrpSpPr>
+        <p:cNvPr id="1" name=""/>
+        <p:cNvGrpSpPr/>
+        <p:nvPr/>
+      </p:nvGrpSpPr>
+      <p:grpSpPr>
+        <a:xfrm>
+          <a:off x="0" y="0"/>
+          <a:ext cx="0" cy="0"/>
+          <a:chOff x="0" y="0"/>
+          <a:chExt cx="0" cy="0"/>
+        </a:xfrm>
+      </p:grpSpPr>
+      <p:sp>
+        <p:nvSpPr>
+          <p:cNvPr id="2" name="Title 1">
+            <a:extLst>
+              <a:ext uri="{FF2B5EF4-FFF2-40B4-BE49-F238E27FC236}">
+                <a16:creationId xmlns:a16="http://schemas.microsoft.com/office/drawing/2014/main" id="{25EBC00B-3F13-4EDE-3CD5-C8C7900832EB}"/>
+              </a:ext>
+            </a:extLst>
+          </p:cNvPr>
+          <p:cNvSpPr>
+            <a:spLocks noGrp="1"/>
+          </p:cNvSpPr>
+          <p:nvPr>
+            <p:ph type="title"/>
+          </p:nvPr>
+        </p:nvSpPr>
+        <p:spPr>
+          <a:xfrm>
+            <a:off x="132512" y="155223"/>
+            <a:ext cx="11919579" cy="834128"/>
+          </a:xfrm>
+        </p:spPr>
+        <p:txBody>
+          <a:bodyPr/>
+          <a:lstStyle/>
+          <a:p>
+            <a:pPr algn="l">
+              <a:tabLst>
+                <a:tab pos="2435225" algn="l"/>
+              </a:tabLst>
+            </a:pPr>
+            <a:r>
+              <a:rPr lang="en-GB" dirty="0"/>
+              <a:t>CNOT(1=&gt;2) </a:t>
+            </a:r>
+            <a:r>
+              <a:rPr lang="en-GB" sz="1800" dirty="0"/>
+              <a:t>x</a:t>
+            </a:r>
+            <a:r>
+              <a:rPr lang="en-GB" dirty="0"/>
+              <a:t> CNOT(1=&gt;3)</a:t>
+            </a:r>
+          </a:p>
+        </p:txBody>
+      </p:sp>
+      <p:sp>
+        <p:nvSpPr>
+          <p:cNvPr id="6" name="TextBox 5">
+            <a:extLst>
+              <a:ext uri="{FF2B5EF4-FFF2-40B4-BE49-F238E27FC236}">
+                <a16:creationId xmlns:a16="http://schemas.microsoft.com/office/drawing/2014/main" id="{CE4523DF-6FFE-3523-48D2-749630BA937C}"/>
+              </a:ext>
+            </a:extLst>
+          </p:cNvPr>
+          <p:cNvSpPr txBox="1"/>
+          <p:nvPr/>
+        </p:nvSpPr>
+        <p:spPr>
+          <a:xfrm>
+            <a:off x="132512" y="1196623"/>
+            <a:ext cx="3105779" cy="2585323"/>
+          </a:xfrm>
+          <a:prstGeom prst="rect">
+            <a:avLst/>
+          </a:prstGeom>
+          <a:noFill/>
+        </p:spPr>
+        <p:txBody>
+          <a:bodyPr wrap="square" rtlCol="0">
+            <a:spAutoFit/>
+          </a:bodyPr>
+          <a:lstStyle/>
+          <a:p>
+            <a:endParaRPr lang="en-GB" b="0" i="0" dirty="0">
+              <a:solidFill>
+                <a:schemeClr val="tx1"/>
+              </a:solidFill>
+              <a:effectLst/>
+              <a:latin typeface="Menlo" panose="020B0609030804020204" pitchFamily="49" charset="0"/>
+            </a:endParaRPr>
+          </a:p>
+          <a:p>
+            <a:r>
+              <a:rPr lang="en-GB" b="0" i="0" dirty="0">
+                <a:solidFill>
+                  <a:schemeClr val="tx1"/>
+                </a:solidFill>
+                <a:effectLst/>
+                <a:latin typeface="Menlo" panose="020B0609030804020204" pitchFamily="49" charset="0"/>
+              </a:rPr>
+              <a:t>Fidelity: </a:t>
+            </a:r>
+          </a:p>
+          <a:p>
+            <a:pPr marL="228600" lvl="1" indent="0">
+              <a:buNone/>
+            </a:pPr>
+            <a:r>
+              <a:rPr lang="en-DE" b="1" i="0" dirty="0">
+                <a:solidFill>
+                  <a:schemeClr val="tx1"/>
+                </a:solidFill>
+                <a:effectLst/>
+                <a:latin typeface="Menlo" panose="020B0609030804020204" pitchFamily="49" charset="0"/>
+              </a:rPr>
+              <a:t>0.9990</a:t>
+            </a:r>
+            <a:endParaRPr lang="en-GB" b="1" i="0" dirty="0">
+              <a:solidFill>
+                <a:schemeClr val="tx1"/>
+              </a:solidFill>
+              <a:effectLst/>
+              <a:latin typeface="Menlo" panose="020B0609030804020204" pitchFamily="49" charset="0"/>
+            </a:endParaRPr>
+          </a:p>
+          <a:p>
+            <a:endParaRPr lang="en-GB" dirty="0">
+              <a:solidFill>
+                <a:schemeClr val="tx1"/>
+              </a:solidFill>
+              <a:latin typeface="Menlo" panose="020B0609030804020204" pitchFamily="49" charset="0"/>
+            </a:endParaRPr>
+          </a:p>
+          <a:p>
+            <a:r>
+              <a:rPr lang="en-GB" dirty="0">
+                <a:solidFill>
+                  <a:schemeClr val="tx1"/>
+                </a:solidFill>
+                <a:latin typeface="Menlo" panose="020B0609030804020204" pitchFamily="49" charset="0"/>
+              </a:rPr>
+              <a:t>Time: </a:t>
+            </a:r>
+          </a:p>
+          <a:p>
+            <a:pPr marL="0" indent="0">
+              <a:buNone/>
+            </a:pPr>
+            <a:r>
+              <a:rPr lang="en-GB" dirty="0">
+                <a:solidFill>
+                  <a:schemeClr val="tx1"/>
+                </a:solidFill>
+                <a:latin typeface="Menlo" panose="020B0609030804020204" pitchFamily="49" charset="0"/>
+              </a:rPr>
+              <a:t>  18 min</a:t>
+            </a:r>
+          </a:p>
+          <a:p>
+            <a:endParaRPr lang="en-GB" dirty="0">
+              <a:solidFill>
+                <a:schemeClr val="tx1"/>
+              </a:solidFill>
+              <a:latin typeface="Menlo" panose="020B0609030804020204" pitchFamily="49" charset="0"/>
+            </a:endParaRPr>
+          </a:p>
+          <a:p>
+            <a:r>
+              <a:rPr lang="en-GB" dirty="0">
+                <a:solidFill>
+                  <a:schemeClr val="tx1"/>
+                </a:solidFill>
+                <a:latin typeface="Menlo" panose="020B0609030804020204" pitchFamily="49" charset="0"/>
+              </a:rPr>
+              <a:t># params:</a:t>
+            </a:r>
+          </a:p>
+          <a:p>
+            <a:pPr marL="0" indent="0">
+              <a:buNone/>
+            </a:pPr>
+            <a:r>
+              <a:rPr lang="en-GB" dirty="0">
+                <a:solidFill>
+                  <a:schemeClr val="tx1"/>
+                </a:solidFill>
+                <a:latin typeface="Menlo" panose="020B0609030804020204" pitchFamily="49" charset="0"/>
+              </a:rPr>
+              <a:t>  54</a:t>
+            </a:r>
+            <a:endParaRPr lang="en-GB" dirty="0">
+              <a:solidFill>
+                <a:schemeClr val="tx1"/>
+              </a:solidFill>
+            </a:endParaRPr>
+          </a:p>
+        </p:txBody>
+      </p:sp>
+      <p:pic>
+        <p:nvPicPr>
+          <p:cNvPr id="7" name="Picture 6">
+            <a:extLst>
+              <a:ext uri="{FF2B5EF4-FFF2-40B4-BE49-F238E27FC236}">
+                <a16:creationId xmlns:a16="http://schemas.microsoft.com/office/drawing/2014/main" id="{07444CE7-D9BF-0616-C6C4-21AFBD1795C2}"/>
+              </a:ext>
+            </a:extLst>
+          </p:cNvPr>
+          <p:cNvPicPr>
+            <a:picLocks noChangeAspect="1"/>
+          </p:cNvPicPr>
+          <p:nvPr/>
+        </p:nvPicPr>
+        <p:blipFill>
+          <a:blip r:embed="rId2"/>
+          <a:stretch>
+            <a:fillRect/>
+          </a:stretch>
+        </p:blipFill>
+        <p:spPr>
+          <a:xfrm>
+            <a:off x="2411807" y="1245765"/>
+            <a:ext cx="9640284" cy="5486905"/>
+          </a:xfrm>
+          <a:prstGeom prst="rect">
+            <a:avLst/>
+          </a:prstGeom>
+        </p:spPr>
+      </p:pic>
+    </p:spTree>
+    <p:extLst>
+      <p:ext uri="{BB962C8B-B14F-4D97-AF65-F5344CB8AC3E}">
+        <p14:creationId xmlns:p14="http://schemas.microsoft.com/office/powerpoint/2010/main" val="3429246395"/>
+      </p:ext>
+    </p:extLst>
+  </p:cSld>
+  <p:clrMapOvr>
+    <a:masterClrMapping/>
+  </p:clrMapOvr>
+</p:sld>
+</file>
+
+<file path=ppt/slides/slide11.xml><?xml version="1.0" encoding="utf-8"?>
+<p:sld xmlns:a="http://schemas.openxmlformats.org/drawingml/2006/main" xmlns:r="http://schemas.openxmlformats.org/officeDocument/2006/relationships" xmlns:p="http://schemas.openxmlformats.org/presentationml/2006/main">
+  <p:cSld>
+    <p:spTree>
+      <p:nvGrpSpPr>
+        <p:cNvPr id="1" name=""/>
+        <p:cNvGrpSpPr/>
+        <p:nvPr/>
+      </p:nvGrpSpPr>
+      <p:grpSpPr>
+        <a:xfrm>
+          <a:off x="0" y="0"/>
+          <a:ext cx="0" cy="0"/>
+          <a:chOff x="0" y="0"/>
+          <a:chExt cx="0" cy="0"/>
+        </a:xfrm>
+      </p:grpSpPr>
+      <p:sp>
+        <p:nvSpPr>
+          <p:cNvPr id="2" name="Title 1">
+            <a:extLst>
+              <a:ext uri="{FF2B5EF4-FFF2-40B4-BE49-F238E27FC236}">
+                <a16:creationId xmlns:a16="http://schemas.microsoft.com/office/drawing/2014/main" id="{25EBC00B-3F13-4EDE-3CD5-C8C7900832EB}"/>
+              </a:ext>
+            </a:extLst>
+          </p:cNvPr>
+          <p:cNvSpPr>
+            <a:spLocks noGrp="1"/>
+          </p:cNvSpPr>
+          <p:nvPr>
+            <p:ph type="title"/>
+          </p:nvPr>
+        </p:nvSpPr>
+        <p:spPr>
+          <a:xfrm>
+            <a:off x="132512" y="155223"/>
+            <a:ext cx="11919579" cy="834128"/>
+          </a:xfrm>
+        </p:spPr>
+        <p:txBody>
+          <a:bodyPr/>
+          <a:lstStyle/>
+          <a:p>
+            <a:pPr algn="l">
+              <a:tabLst>
+                <a:tab pos="2435225" algn="l"/>
+              </a:tabLst>
+            </a:pPr>
+            <a:r>
+              <a:rPr lang="en-GB" dirty="0"/>
+              <a:t>U_XX</a:t>
+            </a:r>
+          </a:p>
+        </p:txBody>
+      </p:sp>
+      <p:sp>
+        <p:nvSpPr>
+          <p:cNvPr id="6" name="TextBox 5">
+            <a:extLst>
+              <a:ext uri="{FF2B5EF4-FFF2-40B4-BE49-F238E27FC236}">
+                <a16:creationId xmlns:a16="http://schemas.microsoft.com/office/drawing/2014/main" id="{CE4523DF-6FFE-3523-48D2-749630BA937C}"/>
+              </a:ext>
+            </a:extLst>
+          </p:cNvPr>
+          <p:cNvSpPr txBox="1"/>
+          <p:nvPr/>
+        </p:nvSpPr>
+        <p:spPr>
+          <a:xfrm>
+            <a:off x="132512" y="1196623"/>
+            <a:ext cx="3105779" cy="4247317"/>
+          </a:xfrm>
+          <a:prstGeom prst="rect">
+            <a:avLst/>
+          </a:prstGeom>
+          <a:noFill/>
+        </p:spPr>
+        <p:txBody>
+          <a:bodyPr wrap="square" rtlCol="0">
+            <a:spAutoFit/>
+          </a:bodyPr>
+          <a:lstStyle/>
+          <a:p>
+            <a:endParaRPr lang="en-GB" b="0" i="0" dirty="0">
+              <a:solidFill>
+                <a:schemeClr val="tx1"/>
+              </a:solidFill>
+              <a:effectLst/>
+              <a:latin typeface="Menlo" panose="020B0609030804020204" pitchFamily="49" charset="0"/>
+            </a:endParaRPr>
+          </a:p>
+          <a:p>
+            <a:r>
+              <a:rPr lang="en-GB" b="0" i="0" dirty="0">
+                <a:solidFill>
+                  <a:schemeClr val="tx1"/>
+                </a:solidFill>
+                <a:effectLst/>
+                <a:latin typeface="Menlo" panose="020B0609030804020204" pitchFamily="49" charset="0"/>
+              </a:rPr>
+              <a:t>Fidelity: </a:t>
+            </a:r>
+          </a:p>
+          <a:p>
+            <a:pPr marL="228600" lvl="1" indent="0">
+              <a:buNone/>
+            </a:pPr>
+            <a:r>
+              <a:rPr lang="en-DE" b="1" i="0" dirty="0">
+                <a:solidFill>
+                  <a:schemeClr val="tx1"/>
+                </a:solidFill>
+                <a:effectLst/>
+                <a:latin typeface="Menlo" panose="020B0609030804020204" pitchFamily="49" charset="0"/>
+              </a:rPr>
+              <a:t>0.97223</a:t>
+            </a:r>
+          </a:p>
+          <a:p>
+            <a:pPr marL="228600" lvl="1" indent="0">
+              <a:buNone/>
+            </a:pPr>
+            <a:r>
+              <a:rPr lang="en-DE" dirty="0">
+                <a:latin typeface="Menlo" panose="020B0609030804020204" pitchFamily="49" charset="0"/>
+              </a:rPr>
+              <a:t>(0.96 with </a:t>
+            </a:r>
+          </a:p>
+          <a:p>
+            <a:pPr marL="228600" lvl="1" indent="0">
+              <a:buNone/>
+            </a:pPr>
+            <a:r>
+              <a:rPr lang="en-DE" i="0" dirty="0">
+                <a:solidFill>
+                  <a:schemeClr val="tx1"/>
+                </a:solidFill>
+                <a:effectLst/>
+                <a:latin typeface="Menlo" panose="020B0609030804020204" pitchFamily="49" charset="0"/>
+              </a:rPr>
+              <a:t>time opt.)</a:t>
+            </a:r>
+            <a:endParaRPr lang="en-GB" i="0" dirty="0">
+              <a:solidFill>
+                <a:schemeClr val="tx1"/>
+              </a:solidFill>
+              <a:effectLst/>
+              <a:latin typeface="Menlo" panose="020B0609030804020204" pitchFamily="49" charset="0"/>
+            </a:endParaRPr>
+          </a:p>
+          <a:p>
+            <a:endParaRPr lang="en-GB" dirty="0">
+              <a:solidFill>
+                <a:schemeClr val="tx1"/>
+              </a:solidFill>
+              <a:latin typeface="Menlo" panose="020B0609030804020204" pitchFamily="49" charset="0"/>
+            </a:endParaRPr>
+          </a:p>
+          <a:p>
+            <a:r>
+              <a:rPr lang="en-GB" dirty="0">
+                <a:solidFill>
+                  <a:schemeClr val="tx1"/>
+                </a:solidFill>
+                <a:latin typeface="Menlo" panose="020B0609030804020204" pitchFamily="49" charset="0"/>
+              </a:rPr>
+              <a:t>Time: </a:t>
+            </a:r>
+          </a:p>
+          <a:p>
+            <a:pPr marL="0" indent="0">
+              <a:buNone/>
+            </a:pPr>
+            <a:r>
+              <a:rPr lang="en-GB" dirty="0">
+                <a:solidFill>
+                  <a:schemeClr val="tx1"/>
+                </a:solidFill>
+                <a:latin typeface="Menlo" panose="020B0609030804020204" pitchFamily="49" charset="0"/>
+              </a:rPr>
+              <a:t>  98 min</a:t>
+            </a:r>
+          </a:p>
+          <a:p>
+            <a:pPr marL="0" indent="0">
+              <a:buNone/>
+            </a:pPr>
+            <a:r>
+              <a:rPr lang="en-GB" dirty="0">
+                <a:latin typeface="Menlo" panose="020B0609030804020204" pitchFamily="49" charset="0"/>
+              </a:rPr>
+              <a:t>  (1d with </a:t>
+            </a:r>
+          </a:p>
+          <a:p>
+            <a:pPr marL="0" indent="0">
+              <a:buNone/>
+            </a:pPr>
+            <a:r>
+              <a:rPr lang="en-GB" dirty="0">
+                <a:solidFill>
+                  <a:schemeClr val="tx1"/>
+                </a:solidFill>
+                <a:latin typeface="Menlo" panose="020B0609030804020204" pitchFamily="49" charset="0"/>
+              </a:rPr>
+              <a:t>  time opt.)</a:t>
+            </a:r>
+          </a:p>
+          <a:p>
+            <a:endParaRPr lang="en-GB" dirty="0">
+              <a:solidFill>
+                <a:schemeClr val="tx1"/>
+              </a:solidFill>
+              <a:latin typeface="Menlo" panose="020B0609030804020204" pitchFamily="49" charset="0"/>
+            </a:endParaRPr>
+          </a:p>
+          <a:p>
+            <a:r>
+              <a:rPr lang="en-GB" dirty="0">
+                <a:solidFill>
+                  <a:schemeClr val="tx1"/>
+                </a:solidFill>
+                <a:latin typeface="Menlo" panose="020B0609030804020204" pitchFamily="49" charset="0"/>
+              </a:rPr>
+              <a:t># params:</a:t>
+            </a:r>
+          </a:p>
+          <a:p>
+            <a:pPr marL="0" indent="0">
+              <a:buNone/>
+            </a:pPr>
+            <a:r>
+              <a:rPr lang="en-GB" dirty="0">
+                <a:solidFill>
+                  <a:schemeClr val="tx1"/>
+                </a:solidFill>
+                <a:latin typeface="Menlo" panose="020B0609030804020204" pitchFamily="49" charset="0"/>
+              </a:rPr>
+              <a:t>  54</a:t>
+            </a:r>
+          </a:p>
+          <a:p>
+            <a:pPr marL="0" indent="0">
+              <a:buNone/>
+            </a:pPr>
+            <a:endParaRPr lang="en-GB" dirty="0">
+              <a:latin typeface="Menlo" panose="020B0609030804020204" pitchFamily="49" charset="0"/>
+            </a:endParaRPr>
+          </a:p>
+          <a:p>
+            <a:pPr marL="0" indent="0">
+              <a:buNone/>
+            </a:pPr>
+            <a:r>
+              <a:rPr lang="en-GB" dirty="0">
+                <a:solidFill>
+                  <a:schemeClr val="tx1"/>
+                </a:solidFill>
+                <a:latin typeface="Menlo" panose="020B0609030804020204" pitchFamily="49" charset="0"/>
+              </a:rPr>
+              <a:t>(</a:t>
+            </a:r>
+            <a:r>
+              <a:rPr lang="en-GB" dirty="0" err="1">
+                <a:solidFill>
+                  <a:schemeClr val="tx1"/>
+                </a:solidFill>
+                <a:latin typeface="Menlo" panose="020B0609030804020204" pitchFamily="49" charset="0"/>
+              </a:rPr>
+              <a:t>T_opt</a:t>
+            </a:r>
+            <a:r>
+              <a:rPr lang="en-GB" dirty="0">
+                <a:solidFill>
+                  <a:schemeClr val="tx1"/>
+                </a:solidFill>
+                <a:latin typeface="Menlo" panose="020B0609030804020204" pitchFamily="49" charset="0"/>
+              </a:rPr>
+              <a:t>=2µs)</a:t>
+            </a:r>
+            <a:endParaRPr lang="en-GB" dirty="0">
+              <a:solidFill>
+                <a:schemeClr val="tx1"/>
+              </a:solidFill>
+            </a:endParaRPr>
+          </a:p>
+        </p:txBody>
+      </p:sp>
+      <p:pic>
+        <p:nvPicPr>
+          <p:cNvPr id="7" name="Picture 6">
+            <a:extLst>
+              <a:ext uri="{FF2B5EF4-FFF2-40B4-BE49-F238E27FC236}">
+                <a16:creationId xmlns:a16="http://schemas.microsoft.com/office/drawing/2014/main" id="{07444CE7-D9BF-0616-C6C4-21AFBD1795C2}"/>
+              </a:ext>
+            </a:extLst>
+          </p:cNvPr>
+          <p:cNvPicPr>
+            <a:picLocks noChangeAspect="1"/>
+          </p:cNvPicPr>
+          <p:nvPr/>
+        </p:nvPicPr>
+        <p:blipFill>
+          <a:blip r:embed="rId2"/>
+          <a:srcRect/>
+          <a:stretch/>
+        </p:blipFill>
+        <p:spPr>
+          <a:xfrm>
+            <a:off x="2411807" y="1245765"/>
+            <a:ext cx="9640283" cy="5486905"/>
+          </a:xfrm>
+          <a:prstGeom prst="rect">
+            <a:avLst/>
+          </a:prstGeom>
+        </p:spPr>
+      </p:pic>
+    </p:spTree>
+    <p:extLst>
+      <p:ext uri="{BB962C8B-B14F-4D97-AF65-F5344CB8AC3E}">
+        <p14:creationId xmlns:p14="http://schemas.microsoft.com/office/powerpoint/2010/main" val="3726479046"/>
+      </p:ext>
+    </p:extLst>
+  </p:cSld>
+  <p:clrMapOvr>
+    <a:masterClrMapping/>
+  </p:clrMapOvr>
+</p:sld>
+</file>
+
+<file path=ppt/slides/slide12.xml><?xml version="1.0" encoding="utf-8"?>
+<p:sld xmlns:a="http://schemas.openxmlformats.org/drawingml/2006/main" xmlns:r="http://schemas.openxmlformats.org/officeDocument/2006/relationships" xmlns:p="http://schemas.openxmlformats.org/presentationml/2006/main">
+  <p:cSld>
+    <p:spTree>
+      <p:nvGrpSpPr>
+        <p:cNvPr id="1" name=""/>
+        <p:cNvGrpSpPr/>
+        <p:nvPr/>
+      </p:nvGrpSpPr>
+      <p:grpSpPr>
+        <a:xfrm>
+          <a:off x="0" y="0"/>
+          <a:ext cx="0" cy="0"/>
+          <a:chOff x="0" y="0"/>
+          <a:chExt cx="0" cy="0"/>
+        </a:xfrm>
+      </p:grpSpPr>
+      <p:sp>
+        <p:nvSpPr>
+          <p:cNvPr id="2" name="Title 1">
+            <a:extLst>
+              <a:ext uri="{FF2B5EF4-FFF2-40B4-BE49-F238E27FC236}">
+                <a16:creationId xmlns:a16="http://schemas.microsoft.com/office/drawing/2014/main" id="{25EBC00B-3F13-4EDE-3CD5-C8C7900832EB}"/>
+              </a:ext>
+            </a:extLst>
+          </p:cNvPr>
+          <p:cNvSpPr>
+            <a:spLocks noGrp="1"/>
+          </p:cNvSpPr>
+          <p:nvPr>
+            <p:ph type="title"/>
+          </p:nvPr>
+        </p:nvSpPr>
+        <p:spPr>
+          <a:xfrm>
+            <a:off x="136210" y="1252503"/>
+            <a:ext cx="11919579" cy="834128"/>
+          </a:xfrm>
+        </p:spPr>
+        <p:txBody>
+          <a:bodyPr/>
+          <a:lstStyle/>
+          <a:p>
+            <a:pPr algn="l">
+              <a:tabLst>
+                <a:tab pos="2435225" algn="l"/>
+              </a:tabLst>
+            </a:pPr>
+            <a:r>
+              <a:rPr lang="en-GB" dirty="0"/>
+              <a:t>Level b Hamiltonian, 2 controls (</a:t>
+            </a:r>
+            <a:r>
+              <a:rPr lang="en-GB" dirty="0" err="1"/>
+              <a:t>B_x</a:t>
+            </a:r>
+            <a:r>
+              <a:rPr lang="en-GB" dirty="0"/>
+              <a:t>, </a:t>
+            </a:r>
+            <a:r>
+              <a:rPr lang="en-GB" dirty="0" err="1"/>
+              <a:t>B_y</a:t>
+            </a:r>
+            <a:r>
+              <a:rPr lang="en-GB" dirty="0"/>
+              <a:t>) total </a:t>
+            </a:r>
+          </a:p>
+        </p:txBody>
+      </p:sp>
+      <p:pic>
+        <p:nvPicPr>
+          <p:cNvPr id="3" name="Picture 2">
+            <a:extLst>
+              <a:ext uri="{FF2B5EF4-FFF2-40B4-BE49-F238E27FC236}">
+                <a16:creationId xmlns:a16="http://schemas.microsoft.com/office/drawing/2014/main" id="{07BA2727-2269-E584-BF1D-BECF035EE4F9}"/>
+              </a:ext>
+            </a:extLst>
+          </p:cNvPr>
+          <p:cNvPicPr>
+            <a:picLocks noChangeAspect="1"/>
+          </p:cNvPicPr>
+          <p:nvPr/>
+        </p:nvPicPr>
+        <p:blipFill rotWithShape="1">
+          <a:blip r:embed="rId2"/>
+          <a:srcRect t="3917"/>
+          <a:stretch/>
+        </p:blipFill>
+        <p:spPr>
+          <a:xfrm>
+            <a:off x="3718559" y="2382592"/>
+            <a:ext cx="7772400" cy="3804906"/>
+          </a:xfrm>
+          <a:prstGeom prst="rect">
+            <a:avLst/>
+          </a:prstGeom>
+        </p:spPr>
+      </p:pic>
+      <p:sp>
+        <p:nvSpPr>
+          <p:cNvPr id="4" name="TextBox 3">
+            <a:extLst>
+              <a:ext uri="{FF2B5EF4-FFF2-40B4-BE49-F238E27FC236}">
+                <a16:creationId xmlns:a16="http://schemas.microsoft.com/office/drawing/2014/main" id="{25C3D07E-0D18-D513-103A-A9AA76BA64A4}"/>
+              </a:ext>
+            </a:extLst>
+          </p:cNvPr>
+          <p:cNvSpPr txBox="1"/>
+          <p:nvPr/>
+        </p:nvSpPr>
+        <p:spPr>
+          <a:xfrm>
+            <a:off x="365760" y="2636520"/>
+            <a:ext cx="3048000" cy="2031325"/>
+          </a:xfrm>
+          <a:prstGeom prst="rect">
+            <a:avLst/>
+          </a:prstGeom>
+          <a:noFill/>
+        </p:spPr>
+        <p:txBody>
+          <a:bodyPr wrap="square" rtlCol="0">
+            <a:spAutoFit/>
+          </a:bodyPr>
+          <a:lstStyle/>
+          <a:p>
+            <a:pPr marL="285750" indent="-285750">
+              <a:buFontTx/>
+              <a:buChar char="-"/>
+            </a:pPr>
+            <a:r>
+              <a:rPr lang="en-GB" dirty="0"/>
+              <a:t>fid: 0.57</a:t>
+            </a:r>
+          </a:p>
+          <a:p>
+            <a:pPr marL="285750" indent="-285750">
+              <a:buFontTx/>
+              <a:buChar char="-"/>
+            </a:pPr>
+            <a:endParaRPr lang="en-GB" dirty="0"/>
+          </a:p>
+          <a:p>
+            <a:pPr marL="285750" indent="-285750">
+              <a:buFontTx/>
+              <a:buChar char="-"/>
+            </a:pPr>
+            <a:r>
+              <a:rPr lang="en-GB" dirty="0"/>
+              <a:t>CPU time: 23 min</a:t>
+            </a:r>
+          </a:p>
+          <a:p>
+            <a:pPr marL="285750" indent="-285750">
+              <a:buFontTx/>
+              <a:buChar char="-"/>
+            </a:pPr>
+            <a:endParaRPr lang="en-GB" dirty="0"/>
+          </a:p>
+          <a:p>
+            <a:pPr marL="285750" indent="-285750">
+              <a:buFontTx/>
+              <a:buChar char="-"/>
+            </a:pPr>
+            <a:r>
+              <a:rPr lang="en-GB" dirty="0" err="1"/>
+              <a:t>T_opt</a:t>
+            </a:r>
+            <a:r>
+              <a:rPr lang="en-GB" dirty="0"/>
+              <a:t> = 2µs</a:t>
+            </a:r>
+          </a:p>
+          <a:p>
+            <a:pPr marL="285750" indent="-285750">
+              <a:buFontTx/>
+              <a:buChar char="-"/>
+            </a:pPr>
+            <a:endParaRPr lang="en-GB" dirty="0"/>
+          </a:p>
+          <a:p>
+            <a:pPr marL="285750" indent="-285750">
+              <a:buFontTx/>
+              <a:buChar char="-"/>
+            </a:pPr>
+            <a:r>
+              <a:rPr lang="en-GB" dirty="0" err="1"/>
+              <a:t>N_freq</a:t>
+            </a:r>
+            <a:r>
+              <a:rPr lang="en-GB" dirty="0"/>
+              <a:t> = 6</a:t>
+            </a:r>
+          </a:p>
+        </p:txBody>
+      </p:sp>
+    </p:spTree>
+    <p:extLst>
+      <p:ext uri="{BB962C8B-B14F-4D97-AF65-F5344CB8AC3E}">
+        <p14:creationId xmlns:p14="http://schemas.microsoft.com/office/powerpoint/2010/main" val="4103457670"/>
+      </p:ext>
+    </p:extLst>
+  </p:cSld>
+  <p:clrMapOvr>
+    <a:masterClrMapping/>
+  </p:clrMapOvr>
+</p:sld>
+</file>
+
+<file path=ppt/slides/slide13.xml><?xml version="1.0" encoding="utf-8"?>
+<p:sld xmlns:a="http://schemas.openxmlformats.org/drawingml/2006/main" xmlns:r="http://schemas.openxmlformats.org/officeDocument/2006/relationships" xmlns:p="http://schemas.openxmlformats.org/presentationml/2006/main">
+  <p:cSld>
+    <p:spTree>
+      <p:nvGrpSpPr>
+        <p:cNvPr id="1" name=""/>
+        <p:cNvGrpSpPr/>
+        <p:nvPr/>
+      </p:nvGrpSpPr>
+      <p:grpSpPr>
+        <a:xfrm>
+          <a:off x="0" y="0"/>
+          <a:ext cx="0" cy="0"/>
+          <a:chOff x="0" y="0"/>
+          <a:chExt cx="0" cy="0"/>
+        </a:xfrm>
+      </p:grpSpPr>
+      <p:sp>
+        <p:nvSpPr>
+          <p:cNvPr id="2" name="Title 1">
+            <a:extLst>
+              <a:ext uri="{FF2B5EF4-FFF2-40B4-BE49-F238E27FC236}">
+                <a16:creationId xmlns:a16="http://schemas.microsoft.com/office/drawing/2014/main" id="{25EBC00B-3F13-4EDE-3CD5-C8C7900832EB}"/>
+              </a:ext>
+            </a:extLst>
+          </p:cNvPr>
+          <p:cNvSpPr>
+            <a:spLocks noGrp="1"/>
+          </p:cNvSpPr>
+          <p:nvPr>
+            <p:ph type="title"/>
+          </p:nvPr>
+        </p:nvSpPr>
+        <p:spPr>
+          <a:xfrm>
+            <a:off x="136210" y="1252503"/>
+            <a:ext cx="11919579" cy="834128"/>
+          </a:xfrm>
+        </p:spPr>
+        <p:txBody>
+          <a:bodyPr/>
+          <a:lstStyle/>
+          <a:p>
+            <a:pPr algn="l">
+              <a:tabLst>
+                <a:tab pos="2435225" algn="l"/>
+              </a:tabLst>
+            </a:pPr>
+            <a:r>
+              <a:rPr lang="en-GB" dirty="0"/>
+              <a:t>Level C Hamiltonian, 2 controls (</a:t>
+            </a:r>
+            <a:r>
+              <a:rPr lang="en-GB" dirty="0" err="1"/>
+              <a:t>B_x</a:t>
+            </a:r>
+            <a:r>
+              <a:rPr lang="en-GB" dirty="0"/>
+              <a:t>, </a:t>
+            </a:r>
+            <a:r>
+              <a:rPr lang="en-GB" dirty="0" err="1"/>
+              <a:t>B_y</a:t>
+            </a:r>
+            <a:r>
+              <a:rPr lang="en-GB" dirty="0"/>
+              <a:t>) total </a:t>
+            </a:r>
+          </a:p>
+        </p:txBody>
+      </p:sp>
+      <p:pic>
+        <p:nvPicPr>
+          <p:cNvPr id="3" name="Picture 2">
+            <a:extLst>
+              <a:ext uri="{FF2B5EF4-FFF2-40B4-BE49-F238E27FC236}">
+                <a16:creationId xmlns:a16="http://schemas.microsoft.com/office/drawing/2014/main" id="{07BA2727-2269-E584-BF1D-BECF035EE4F9}"/>
+              </a:ext>
+            </a:extLst>
+          </p:cNvPr>
+          <p:cNvPicPr>
+            <a:picLocks noChangeAspect="1"/>
+          </p:cNvPicPr>
+          <p:nvPr/>
+        </p:nvPicPr>
+        <p:blipFill rotWithShape="1">
+          <a:blip r:embed="rId2"/>
+          <a:srcRect t="4567"/>
+          <a:stretch/>
+        </p:blipFill>
+        <p:spPr>
+          <a:xfrm>
+            <a:off x="3722901" y="2408348"/>
+            <a:ext cx="7763715" cy="3779149"/>
+          </a:xfrm>
+          <a:prstGeom prst="rect">
+            <a:avLst/>
+          </a:prstGeom>
+        </p:spPr>
+      </p:pic>
+      <p:sp>
+        <p:nvSpPr>
+          <p:cNvPr id="4" name="TextBox 3">
+            <a:extLst>
+              <a:ext uri="{FF2B5EF4-FFF2-40B4-BE49-F238E27FC236}">
+                <a16:creationId xmlns:a16="http://schemas.microsoft.com/office/drawing/2014/main" id="{25C3D07E-0D18-D513-103A-A9AA76BA64A4}"/>
+              </a:ext>
+            </a:extLst>
+          </p:cNvPr>
+          <p:cNvSpPr txBox="1"/>
+          <p:nvPr/>
+        </p:nvSpPr>
+        <p:spPr>
+          <a:xfrm>
+            <a:off x="365760" y="2636520"/>
+            <a:ext cx="3048000" cy="2031325"/>
+          </a:xfrm>
+          <a:prstGeom prst="rect">
+            <a:avLst/>
+          </a:prstGeom>
+          <a:noFill/>
+        </p:spPr>
+        <p:txBody>
+          <a:bodyPr wrap="square" rtlCol="0">
+            <a:spAutoFit/>
+          </a:bodyPr>
+          <a:lstStyle/>
+          <a:p>
+            <a:pPr marL="285750" indent="-285750">
+              <a:buFontTx/>
+              <a:buChar char="-"/>
+            </a:pPr>
+            <a:r>
+              <a:rPr lang="en-GB" dirty="0"/>
+              <a:t>fid: 0.208</a:t>
+            </a:r>
+          </a:p>
+          <a:p>
+            <a:pPr marL="285750" indent="-285750">
+              <a:buFontTx/>
+              <a:buChar char="-"/>
+            </a:pPr>
+            <a:endParaRPr lang="en-GB" dirty="0"/>
+          </a:p>
+          <a:p>
+            <a:pPr marL="285750" indent="-285750">
+              <a:buFontTx/>
+              <a:buChar char="-"/>
+            </a:pPr>
+            <a:r>
+              <a:rPr lang="en-GB" dirty="0"/>
+              <a:t>CPU time: 565 min</a:t>
+            </a:r>
+          </a:p>
+          <a:p>
+            <a:pPr marL="285750" indent="-285750">
+              <a:buFontTx/>
+              <a:buChar char="-"/>
+            </a:pPr>
+            <a:endParaRPr lang="en-GB" dirty="0"/>
+          </a:p>
+          <a:p>
+            <a:pPr marL="285750" indent="-285750">
+              <a:buFontTx/>
+              <a:buChar char="-"/>
+            </a:pPr>
+            <a:r>
+              <a:rPr lang="en-GB" dirty="0" err="1"/>
+              <a:t>T_opt</a:t>
+            </a:r>
+            <a:r>
+              <a:rPr lang="en-GB" dirty="0"/>
+              <a:t> = 2µs</a:t>
+            </a:r>
+          </a:p>
+          <a:p>
+            <a:pPr marL="285750" indent="-285750">
+              <a:buFontTx/>
+              <a:buChar char="-"/>
+            </a:pPr>
+            <a:endParaRPr lang="en-GB" dirty="0"/>
+          </a:p>
+          <a:p>
+            <a:pPr marL="285750" indent="-285750">
+              <a:buFontTx/>
+              <a:buChar char="-"/>
+            </a:pPr>
+            <a:r>
+              <a:rPr lang="en-GB" dirty="0" err="1"/>
+              <a:t>N_freq</a:t>
+            </a:r>
+            <a:r>
+              <a:rPr lang="en-GB" dirty="0"/>
+              <a:t> = 6</a:t>
+            </a:r>
+          </a:p>
+        </p:txBody>
+      </p:sp>
+    </p:spTree>
+    <p:extLst>
+      <p:ext uri="{BB962C8B-B14F-4D97-AF65-F5344CB8AC3E}">
+        <p14:creationId xmlns:p14="http://schemas.microsoft.com/office/powerpoint/2010/main" val="1785485163"/>
+      </p:ext>
+    </p:extLst>
+  </p:cSld>
+  <p:clrMapOvr>
+    <a:masterClrMapping/>
+  </p:clrMapOvr>
+</p:sld>
+</file>
+
+<file path=ppt/slides/slide14.xml><?xml version="1.0" encoding="utf-8"?>
+<p:sld xmlns:a="http://schemas.openxmlformats.org/drawingml/2006/main" xmlns:r="http://schemas.openxmlformats.org/officeDocument/2006/relationships" xmlns:p="http://schemas.openxmlformats.org/presentationml/2006/main">
+  <p:cSld>
+    <p:spTree>
+      <p:nvGrpSpPr>
+        <p:cNvPr id="1" name=""/>
+        <p:cNvGrpSpPr/>
+        <p:nvPr/>
+      </p:nvGrpSpPr>
+      <p:grpSpPr>
+        <a:xfrm>
+          <a:off x="0" y="0"/>
+          <a:ext cx="0" cy="0"/>
+          <a:chOff x="0" y="0"/>
+          <a:chExt cx="0" cy="0"/>
+        </a:xfrm>
+      </p:grpSpPr>
+      <p:sp>
+        <p:nvSpPr>
+          <p:cNvPr id="2" name="Title 1">
+            <a:extLst>
+              <a:ext uri="{FF2B5EF4-FFF2-40B4-BE49-F238E27FC236}">
+                <a16:creationId xmlns:a16="http://schemas.microsoft.com/office/drawing/2014/main" id="{25EBC00B-3F13-4EDE-3CD5-C8C7900832EB}"/>
+              </a:ext>
+            </a:extLst>
+          </p:cNvPr>
+          <p:cNvSpPr>
+            <a:spLocks noGrp="1"/>
+          </p:cNvSpPr>
+          <p:nvPr>
+            <p:ph type="title"/>
+          </p:nvPr>
+        </p:nvSpPr>
+        <p:spPr>
+          <a:xfrm>
+            <a:off x="132512" y="155223"/>
+            <a:ext cx="11919579" cy="834128"/>
+          </a:xfrm>
+        </p:spPr>
+        <p:txBody>
+          <a:bodyPr/>
+          <a:lstStyle/>
+          <a:p>
+            <a:pPr algn="l">
+              <a:tabLst>
+                <a:tab pos="2435225" algn="l"/>
+              </a:tabLst>
+            </a:pPr>
+            <a:r>
+              <a:rPr lang="en-GB" dirty="0"/>
+              <a:t>Two stage warm start</a:t>
+            </a:r>
+          </a:p>
+        </p:txBody>
+      </p:sp>
+      <p:pic>
+        <p:nvPicPr>
+          <p:cNvPr id="3" name="Picture 2">
+            <a:extLst>
+              <a:ext uri="{FF2B5EF4-FFF2-40B4-BE49-F238E27FC236}">
+                <a16:creationId xmlns:a16="http://schemas.microsoft.com/office/drawing/2014/main" id="{99330244-70FA-D448-590D-9506F9BA8A55}"/>
+              </a:ext>
+            </a:extLst>
+          </p:cNvPr>
+          <p:cNvPicPr>
+            <a:picLocks noChangeAspect="1"/>
+          </p:cNvPicPr>
+          <p:nvPr/>
+        </p:nvPicPr>
+        <p:blipFill>
+          <a:blip r:embed="rId2"/>
+          <a:stretch>
+            <a:fillRect/>
+          </a:stretch>
+        </p:blipFill>
+        <p:spPr>
+          <a:xfrm>
+            <a:off x="1450483" y="1290286"/>
+            <a:ext cx="9393527" cy="5169592"/>
+          </a:xfrm>
+          <a:prstGeom prst="rect">
+            <a:avLst/>
+          </a:prstGeom>
+        </p:spPr>
+      </p:pic>
+    </p:spTree>
+    <p:extLst>
+      <p:ext uri="{BB962C8B-B14F-4D97-AF65-F5344CB8AC3E}">
+        <p14:creationId xmlns:p14="http://schemas.microsoft.com/office/powerpoint/2010/main" val="2279792725"/>
+      </p:ext>
+    </p:extLst>
+  </p:cSld>
+  <p:clrMapOvr>
+    <a:masterClrMapping/>
+  </p:clrMapOvr>
+</p:sld>
+</file>
+
+<file path=ppt/slides/slide15.xml><?xml version="1.0" encoding="utf-8"?>
+<p:sld xmlns:a="http://schemas.openxmlformats.org/drawingml/2006/main" xmlns:r="http://schemas.openxmlformats.org/officeDocument/2006/relationships" xmlns:p="http://schemas.openxmlformats.org/presentationml/2006/main">
+  <p:cSld>
+    <p:spTree>
+      <p:nvGrpSpPr>
+        <p:cNvPr id="1" name=""/>
+        <p:cNvGrpSpPr/>
+        <p:nvPr/>
+      </p:nvGrpSpPr>
+      <p:grpSpPr>
+        <a:xfrm>
+          <a:off x="0" y="0"/>
+          <a:ext cx="0" cy="0"/>
+          <a:chOff x="0" y="0"/>
+          <a:chExt cx="0" cy="0"/>
+        </a:xfrm>
+      </p:grpSpPr>
+      <p:sp>
+        <p:nvSpPr>
+          <p:cNvPr id="2" name="Title 1">
+            <a:extLst>
+              <a:ext uri="{FF2B5EF4-FFF2-40B4-BE49-F238E27FC236}">
+                <a16:creationId xmlns:a16="http://schemas.microsoft.com/office/drawing/2014/main" id="{25EBC00B-3F13-4EDE-3CD5-C8C7900832EB}"/>
+              </a:ext>
+            </a:extLst>
+          </p:cNvPr>
+          <p:cNvSpPr>
+            <a:spLocks noGrp="1"/>
+          </p:cNvSpPr>
+          <p:nvPr>
+            <p:ph type="title"/>
+          </p:nvPr>
+        </p:nvSpPr>
+        <p:spPr>
+          <a:xfrm>
+            <a:off x="132512" y="155223"/>
+            <a:ext cx="11919579" cy="834128"/>
+          </a:xfrm>
+        </p:spPr>
+        <p:txBody>
+          <a:bodyPr/>
+          <a:lstStyle/>
+          <a:p>
+            <a:pPr algn="l">
+              <a:tabLst>
+                <a:tab pos="2435225" algn="l"/>
+              </a:tabLst>
+            </a:pPr>
+            <a:endParaRPr lang="en-GB" dirty="0"/>
+          </a:p>
+        </p:txBody>
+      </p:sp>
+    </p:spTree>
+    <p:extLst>
+      <p:ext uri="{BB962C8B-B14F-4D97-AF65-F5344CB8AC3E}">
+        <p14:creationId xmlns:p14="http://schemas.microsoft.com/office/powerpoint/2010/main" val="660939428"/>
+      </p:ext>
+    </p:extLst>
+  </p:cSld>
+  <p:clrMapOvr>
+    <a:masterClrMapping/>
+  </p:clrMapOvr>
+</p:sld>
+</file>
+
+<file path=ppt/slides/slide16.xml><?xml version="1.0" encoding="utf-8"?>
+<p:sld xmlns:a="http://schemas.openxmlformats.org/drawingml/2006/main" xmlns:r="http://schemas.openxmlformats.org/officeDocument/2006/relationships" xmlns:p="http://schemas.openxmlformats.org/presentationml/2006/main">
+  <p:cSld>
+    <p:spTree>
+      <p:nvGrpSpPr>
+        <p:cNvPr id="1" name=""/>
+        <p:cNvGrpSpPr/>
+        <p:nvPr/>
+      </p:nvGrpSpPr>
+      <p:grpSpPr>
+        <a:xfrm>
+          <a:off x="0" y="0"/>
+          <a:ext cx="0" cy="0"/>
+          <a:chOff x="0" y="0"/>
+          <a:chExt cx="0" cy="0"/>
+        </a:xfrm>
+      </p:grpSpPr>
+      <p:sp>
+        <p:nvSpPr>
+          <p:cNvPr id="2" name="Title 1">
+            <a:extLst>
+              <a:ext uri="{FF2B5EF4-FFF2-40B4-BE49-F238E27FC236}">
+                <a16:creationId xmlns:a16="http://schemas.microsoft.com/office/drawing/2014/main" id="{25EBC00B-3F13-4EDE-3CD5-C8C7900832EB}"/>
+              </a:ext>
+            </a:extLst>
+          </p:cNvPr>
+          <p:cNvSpPr>
+            <a:spLocks noGrp="1"/>
+          </p:cNvSpPr>
+          <p:nvPr>
+            <p:ph type="title"/>
+          </p:nvPr>
+        </p:nvSpPr>
+        <p:spPr>
+          <a:xfrm>
+            <a:off x="132512" y="155223"/>
+            <a:ext cx="11919579" cy="834128"/>
+          </a:xfrm>
+        </p:spPr>
+        <p:txBody>
+          <a:bodyPr/>
+          <a:lstStyle/>
+          <a:p>
+            <a:pPr algn="l">
+              <a:tabLst>
+                <a:tab pos="2435225" algn="l"/>
+              </a:tabLst>
+            </a:pPr>
+            <a:endParaRPr lang="en-GB" dirty="0"/>
+          </a:p>
+        </p:txBody>
+      </p:sp>
+    </p:spTree>
+    <p:extLst>
+      <p:ext uri="{BB962C8B-B14F-4D97-AF65-F5344CB8AC3E}">
+        <p14:creationId xmlns:p14="http://schemas.microsoft.com/office/powerpoint/2010/main" val="2218686339"/>
+      </p:ext>
+    </p:extLst>
+  </p:cSld>
+  <p:clrMapOvr>
+    <a:masterClrMapping/>
+  </p:clrMapOvr>
+</p:sld>
+</file>
+
 <file path=ppt/slides/slide2.xml><?xml version="1.0" encoding="utf-8"?>
 <p:sld xmlns:a="http://schemas.openxmlformats.org/drawingml/2006/main" xmlns:r="http://schemas.openxmlformats.org/officeDocument/2006/relationships" xmlns:p="http://schemas.openxmlformats.org/presentationml/2006/main">
   <p:cSld>
@@ -4193,11 +5439,8 @@
           <a:p>
             <a:r>
               <a:rPr lang="en-GB" dirty="0"/>
-              <a:t>Potential solution:  carrier-informed GOAT - hardcode fast frequencies</a:t>
-            </a:r>
-          </a:p>
-          <a:p>
-            <a:endParaRPr lang="en-GB" dirty="0"/>
+              <a:t>=&gt; carrier-informed GOAT</a:t>
+            </a:r>
           </a:p>
           <a:p>
             <a:pPr marL="0" indent="0">
@@ -4513,17 +5756,1162 @@
           <a:bodyPr/>
           <a:lstStyle/>
           <a:p>
+            <a:endParaRPr lang="en-GB" dirty="0"/>
+          </a:p>
+          <a:p>
             <a:r>
               <a:rPr lang="en-GB" dirty="0"/>
-              <a:t>…</a:t>
-            </a:r>
-          </a:p>
-        </p:txBody>
-      </p:sp>
+              <a:t>Carrier informed model ran for ~40h</a:t>
+            </a:r>
+          </a:p>
+          <a:p>
+            <a:pPr marL="0" indent="0">
+              <a:buNone/>
+            </a:pPr>
+            <a:endParaRPr lang="en-GB" dirty="0"/>
+          </a:p>
+          <a:p>
+            <a:r>
+              <a:rPr lang="en-GB" dirty="0"/>
+              <a:t>No fidelity increase (~0.5)</a:t>
+            </a:r>
+          </a:p>
+          <a:p>
+            <a:endParaRPr lang="en-GB" dirty="0"/>
+          </a:p>
+        </p:txBody>
+      </p:sp>
+      <p:pic>
+        <p:nvPicPr>
+          <p:cNvPr id="5" name="Picture 4">
+            <a:extLst>
+              <a:ext uri="{FF2B5EF4-FFF2-40B4-BE49-F238E27FC236}">
+                <a16:creationId xmlns:a16="http://schemas.microsoft.com/office/drawing/2014/main" id="{7706F2B5-C76E-6709-00E4-1DD37F33A900}"/>
+              </a:ext>
+            </a:extLst>
+          </p:cNvPr>
+          <p:cNvPicPr>
+            <a:picLocks noChangeAspect="1"/>
+          </p:cNvPicPr>
+          <p:nvPr/>
+        </p:nvPicPr>
+        <p:blipFill>
+          <a:blip r:embed="rId2"/>
+          <a:stretch>
+            <a:fillRect/>
+          </a:stretch>
+        </p:blipFill>
+        <p:spPr>
+          <a:xfrm>
+            <a:off x="6616490" y="1124262"/>
+            <a:ext cx="5435600" cy="2844800"/>
+          </a:xfrm>
+          <a:prstGeom prst="rect">
+            <a:avLst/>
+          </a:prstGeom>
+        </p:spPr>
+      </p:pic>
     </p:spTree>
     <p:extLst>
       <p:ext uri="{BB962C8B-B14F-4D97-AF65-F5344CB8AC3E}">
         <p14:creationId xmlns:p14="http://schemas.microsoft.com/office/powerpoint/2010/main" val="1423536837"/>
+      </p:ext>
+    </p:extLst>
+  </p:cSld>
+  <p:clrMapOvr>
+    <a:masterClrMapping/>
+  </p:clrMapOvr>
+</p:sld>
+</file>
+
+<file path=ppt/slides/slide6.xml><?xml version="1.0" encoding="utf-8"?>
+<p:sld xmlns:a="http://schemas.openxmlformats.org/drawingml/2006/main" xmlns:r="http://schemas.openxmlformats.org/officeDocument/2006/relationships" xmlns:p="http://schemas.openxmlformats.org/presentationml/2006/main">
+  <p:cSld>
+    <p:spTree>
+      <p:nvGrpSpPr>
+        <p:cNvPr id="1" name=""/>
+        <p:cNvGrpSpPr/>
+        <p:nvPr/>
+      </p:nvGrpSpPr>
+      <p:grpSpPr>
+        <a:xfrm>
+          <a:off x="0" y="0"/>
+          <a:ext cx="0" cy="0"/>
+          <a:chOff x="0" y="0"/>
+          <a:chExt cx="0" cy="0"/>
+        </a:xfrm>
+      </p:grpSpPr>
+      <p:sp>
+        <p:nvSpPr>
+          <p:cNvPr id="2" name="Title 1">
+            <a:extLst>
+              <a:ext uri="{FF2B5EF4-FFF2-40B4-BE49-F238E27FC236}">
+                <a16:creationId xmlns:a16="http://schemas.microsoft.com/office/drawing/2014/main" id="{4C4CD6E3-D1AA-45BF-06E2-119D4CB1EF01}"/>
+              </a:ext>
+            </a:extLst>
+          </p:cNvPr>
+          <p:cNvSpPr>
+            <a:spLocks noGrp="1"/>
+          </p:cNvSpPr>
+          <p:nvPr>
+            <p:ph type="title"/>
+          </p:nvPr>
+        </p:nvSpPr>
+        <p:spPr>
+          <a:xfrm>
+            <a:off x="1600200" y="1240453"/>
+            <a:ext cx="8991600" cy="1645920"/>
+          </a:xfrm>
+        </p:spPr>
+        <p:txBody>
+          <a:bodyPr>
+            <a:normAutofit/>
+          </a:bodyPr>
+          <a:lstStyle/>
+          <a:p>
+            <a:r>
+              <a:rPr lang="en-GB" sz="2800" dirty="0"/>
+              <a:t>Rotating frame </a:t>
+            </a:r>
+            <a:r>
+              <a:rPr lang="en-GB" sz="2800" dirty="0" err="1"/>
+              <a:t>ising</a:t>
+            </a:r>
+            <a:r>
+              <a:rPr lang="en-GB" sz="2800" dirty="0"/>
+              <a:t> Hamiltonian </a:t>
+            </a:r>
+            <a:br>
+              <a:rPr lang="en-GB" sz="2800" dirty="0"/>
+            </a:br>
+            <a:r>
+              <a:rPr lang="en-GB" sz="2800" dirty="0"/>
+              <a:t>+ 2 independent controls per particle</a:t>
+            </a:r>
+          </a:p>
+        </p:txBody>
+      </p:sp>
+      <p:sp>
+        <p:nvSpPr>
+          <p:cNvPr id="3" name="Text Placeholder 2">
+            <a:extLst>
+              <a:ext uri="{FF2B5EF4-FFF2-40B4-BE49-F238E27FC236}">
+                <a16:creationId xmlns:a16="http://schemas.microsoft.com/office/drawing/2014/main" id="{17D16477-B0DB-2856-CE21-3DC9BBA4291E}"/>
+              </a:ext>
+            </a:extLst>
+          </p:cNvPr>
+          <p:cNvSpPr>
+            <a:spLocks noGrp="1"/>
+          </p:cNvSpPr>
+          <p:nvPr>
+            <p:ph type="body" idx="1"/>
+          </p:nvPr>
+        </p:nvSpPr>
+        <p:spPr>
+          <a:xfrm>
+            <a:off x="2695194" y="3104444"/>
+            <a:ext cx="6801612" cy="3579577"/>
+          </a:xfrm>
+        </p:spPr>
+        <p:txBody>
+          <a:bodyPr>
+            <a:normAutofit/>
+          </a:bodyPr>
+          <a:lstStyle/>
+          <a:p>
+            <a:pPr marL="342900" indent="-342900">
+              <a:buFont typeface="Arial" panose="020B0604020202020204" pitchFamily="34" charset="0"/>
+              <a:buChar char="•"/>
+            </a:pPr>
+            <a:r>
+              <a:rPr lang="en-GB" dirty="0"/>
+              <a:t>Hamiltonian: </a:t>
+            </a:r>
+          </a:p>
+          <a:p>
+            <a:pPr marL="342900" indent="-342900">
+              <a:buFont typeface="Arial" panose="020B0604020202020204" pitchFamily="34" charset="0"/>
+              <a:buChar char="•"/>
+            </a:pPr>
+            <a:endParaRPr lang="en-GB" sz="1200" dirty="0"/>
+          </a:p>
+          <a:p>
+            <a:pPr marL="342900" indent="-342900">
+              <a:buFont typeface="Arial" panose="020B0604020202020204" pitchFamily="34" charset="0"/>
+              <a:buChar char="•"/>
+            </a:pPr>
+            <a:endParaRPr lang="en-GB" dirty="0"/>
+          </a:p>
+          <a:p>
+            <a:pPr marL="342900" indent="-342900">
+              <a:buFont typeface="Arial" panose="020B0604020202020204" pitchFamily="34" charset="0"/>
+              <a:buChar char="•"/>
+            </a:pPr>
+            <a:endParaRPr lang="en-GB" dirty="0"/>
+          </a:p>
+          <a:p>
+            <a:endParaRPr lang="en-GB" dirty="0"/>
+          </a:p>
+          <a:p>
+            <a:endParaRPr lang="en-GB" dirty="0"/>
+          </a:p>
+          <a:p>
+            <a:pPr marL="342900" indent="-342900">
+              <a:buFont typeface="Arial" panose="020B0604020202020204" pitchFamily="34" charset="0"/>
+              <a:buChar char="•"/>
+            </a:pPr>
+            <a:r>
+              <a:rPr lang="en-GB" dirty="0"/>
+              <a:t>Controls: </a:t>
+            </a:r>
+            <a:r>
+              <a:rPr lang="el-GR" b="0" i="0" u="none" strike="noStrike" dirty="0">
+                <a:effectLst/>
+                <a:latin typeface="Google Sans"/>
+              </a:rPr>
+              <a:t>σ</a:t>
+            </a:r>
+            <a:r>
+              <a:rPr lang="de-DE" b="0" i="0" u="none" strike="noStrike" dirty="0">
+                <a:effectLst/>
+                <a:latin typeface="Google Sans"/>
+              </a:rPr>
+              <a:t>_x, </a:t>
+            </a:r>
+            <a:r>
+              <a:rPr lang="el-GR" b="0" i="0" u="none" strike="noStrike" dirty="0">
+                <a:effectLst/>
+                <a:latin typeface="Google Sans"/>
+              </a:rPr>
+              <a:t>σ</a:t>
+            </a:r>
+            <a:r>
+              <a:rPr lang="de-DE" b="0" i="0" u="none" strike="noStrike" dirty="0">
+                <a:effectLst/>
+                <a:latin typeface="Google Sans"/>
+              </a:rPr>
+              <a:t>_</a:t>
+            </a:r>
+            <a:r>
+              <a:rPr lang="de-DE" b="0" i="0" u="none" strike="noStrike" dirty="0" err="1">
+                <a:effectLst/>
+                <a:latin typeface="Google Sans"/>
+              </a:rPr>
+              <a:t>y</a:t>
+            </a:r>
+            <a:r>
+              <a:rPr lang="de-DE" b="0" i="0" u="none" strike="noStrike" dirty="0">
+                <a:effectLst/>
+                <a:latin typeface="Google Sans"/>
+              </a:rPr>
+              <a:t> per </a:t>
+            </a:r>
+            <a:r>
+              <a:rPr lang="de-DE" b="0" i="0" u="none" strike="noStrike" dirty="0" err="1">
+                <a:effectLst/>
+                <a:latin typeface="Google Sans"/>
+              </a:rPr>
+              <a:t>particle</a:t>
+            </a:r>
+            <a:endParaRPr lang="de-DE" b="0" i="0" u="none" strike="noStrike" dirty="0">
+              <a:effectLst/>
+              <a:latin typeface="Google Sans"/>
+            </a:endParaRPr>
+          </a:p>
+          <a:p>
+            <a:pPr marL="342900" indent="-342900">
+              <a:buFont typeface="Arial" panose="020B0604020202020204" pitchFamily="34" charset="0"/>
+              <a:buChar char="•"/>
+            </a:pPr>
+            <a:endParaRPr lang="de-DE" dirty="0">
+              <a:latin typeface="Google Sans"/>
+            </a:endParaRPr>
+          </a:p>
+          <a:p>
+            <a:endParaRPr lang="de-DE" b="0" i="0" u="none" strike="noStrike" dirty="0">
+              <a:effectLst/>
+              <a:latin typeface="Google Sans"/>
+            </a:endParaRPr>
+          </a:p>
+          <a:p>
+            <a:pPr marL="342900" indent="-342900">
+              <a:buFont typeface="Arial" panose="020B0604020202020204" pitchFamily="34" charset="0"/>
+              <a:buChar char="•"/>
+            </a:pPr>
+            <a:endParaRPr lang="en-GB" dirty="0"/>
+          </a:p>
+        </p:txBody>
+      </p:sp>
+      <p:pic>
+        <p:nvPicPr>
+          <p:cNvPr id="4" name="Picture 3">
+            <a:extLst>
+              <a:ext uri="{FF2B5EF4-FFF2-40B4-BE49-F238E27FC236}">
+                <a16:creationId xmlns:a16="http://schemas.microsoft.com/office/drawing/2014/main" id="{50068557-B801-2E8B-32AB-6D8811E8C239}"/>
+              </a:ext>
+            </a:extLst>
+          </p:cNvPr>
+          <p:cNvPicPr>
+            <a:picLocks noChangeAspect="1"/>
+          </p:cNvPicPr>
+          <p:nvPr/>
+        </p:nvPicPr>
+        <p:blipFill>
+          <a:blip r:embed="rId2"/>
+          <a:stretch>
+            <a:fillRect/>
+          </a:stretch>
+        </p:blipFill>
+        <p:spPr>
+          <a:xfrm>
+            <a:off x="4706208" y="3542850"/>
+            <a:ext cx="2394857" cy="622940"/>
+          </a:xfrm>
+          <a:prstGeom prst="rect">
+            <a:avLst/>
+          </a:prstGeom>
+        </p:spPr>
+      </p:pic>
+      <p:pic>
+        <p:nvPicPr>
+          <p:cNvPr id="5" name="Picture 4">
+            <a:extLst>
+              <a:ext uri="{FF2B5EF4-FFF2-40B4-BE49-F238E27FC236}">
+                <a16:creationId xmlns:a16="http://schemas.microsoft.com/office/drawing/2014/main" id="{362491FC-8BBF-542D-8BB6-DE471B990BC5}"/>
+              </a:ext>
+            </a:extLst>
+          </p:cNvPr>
+          <p:cNvPicPr>
+            <a:picLocks noChangeAspect="1"/>
+          </p:cNvPicPr>
+          <p:nvPr/>
+        </p:nvPicPr>
+        <p:blipFill>
+          <a:blip r:embed="rId3"/>
+          <a:stretch>
+            <a:fillRect/>
+          </a:stretch>
+        </p:blipFill>
+        <p:spPr>
+          <a:xfrm>
+            <a:off x="4706208" y="6024349"/>
+            <a:ext cx="3691801" cy="453910"/>
+          </a:xfrm>
+          <a:prstGeom prst="rect">
+            <a:avLst/>
+          </a:prstGeom>
+        </p:spPr>
+      </p:pic>
+      <p:pic>
+        <p:nvPicPr>
+          <p:cNvPr id="6" name="Picture 5">
+            <a:extLst>
+              <a:ext uri="{FF2B5EF4-FFF2-40B4-BE49-F238E27FC236}">
+                <a16:creationId xmlns:a16="http://schemas.microsoft.com/office/drawing/2014/main" id="{C831895B-492F-A190-7279-6FEE5377376F}"/>
+              </a:ext>
+            </a:extLst>
+          </p:cNvPr>
+          <p:cNvPicPr>
+            <a:picLocks noChangeAspect="1"/>
+          </p:cNvPicPr>
+          <p:nvPr/>
+        </p:nvPicPr>
+        <p:blipFill rotWithShape="1">
+          <a:blip r:embed="rId4"/>
+          <a:srcRect l="2506"/>
+          <a:stretch/>
+        </p:blipFill>
+        <p:spPr>
+          <a:xfrm>
+            <a:off x="4706208" y="4747446"/>
+            <a:ext cx="3592887" cy="691868"/>
+          </a:xfrm>
+          <a:prstGeom prst="rect">
+            <a:avLst/>
+          </a:prstGeom>
+        </p:spPr>
+      </p:pic>
+      <p:pic>
+        <p:nvPicPr>
+          <p:cNvPr id="7" name="Picture 6">
+            <a:extLst>
+              <a:ext uri="{FF2B5EF4-FFF2-40B4-BE49-F238E27FC236}">
+                <a16:creationId xmlns:a16="http://schemas.microsoft.com/office/drawing/2014/main" id="{87DC5A17-F6C8-8200-B265-177AFD44C083}"/>
+              </a:ext>
+            </a:extLst>
+          </p:cNvPr>
+          <p:cNvPicPr>
+            <a:picLocks noChangeAspect="1"/>
+          </p:cNvPicPr>
+          <p:nvPr/>
+        </p:nvPicPr>
+        <p:blipFill>
+          <a:blip r:embed="rId5"/>
+          <a:stretch>
+            <a:fillRect/>
+          </a:stretch>
+        </p:blipFill>
+        <p:spPr>
+          <a:xfrm>
+            <a:off x="4706208" y="4208176"/>
+            <a:ext cx="5626100" cy="495300"/>
+          </a:xfrm>
+          <a:prstGeom prst="rect">
+            <a:avLst/>
+          </a:prstGeom>
+        </p:spPr>
+      </p:pic>
+    </p:spTree>
+    <p:extLst>
+      <p:ext uri="{BB962C8B-B14F-4D97-AF65-F5344CB8AC3E}">
+        <p14:creationId xmlns:p14="http://schemas.microsoft.com/office/powerpoint/2010/main" val="4078722144"/>
+      </p:ext>
+    </p:extLst>
+  </p:cSld>
+  <p:clrMapOvr>
+    <a:masterClrMapping/>
+  </p:clrMapOvr>
+</p:sld>
+</file>
+
+<file path=ppt/slides/slide7.xml><?xml version="1.0" encoding="utf-8"?>
+<p:sld xmlns:a="http://schemas.openxmlformats.org/drawingml/2006/main" xmlns:r="http://schemas.openxmlformats.org/officeDocument/2006/relationships" xmlns:p="http://schemas.openxmlformats.org/presentationml/2006/main">
+  <p:cSld>
+    <p:spTree>
+      <p:nvGrpSpPr>
+        <p:cNvPr id="1" name=""/>
+        <p:cNvGrpSpPr/>
+        <p:nvPr/>
+      </p:nvGrpSpPr>
+      <p:grpSpPr>
+        <a:xfrm>
+          <a:off x="0" y="0"/>
+          <a:ext cx="0" cy="0"/>
+          <a:chOff x="0" y="0"/>
+          <a:chExt cx="0" cy="0"/>
+        </a:xfrm>
+      </p:grpSpPr>
+      <p:sp>
+        <p:nvSpPr>
+          <p:cNvPr id="2" name="Title 1">
+            <a:extLst>
+              <a:ext uri="{FF2B5EF4-FFF2-40B4-BE49-F238E27FC236}">
+                <a16:creationId xmlns:a16="http://schemas.microsoft.com/office/drawing/2014/main" id="{25EBC00B-3F13-4EDE-3CD5-C8C7900832EB}"/>
+              </a:ext>
+            </a:extLst>
+          </p:cNvPr>
+          <p:cNvSpPr>
+            <a:spLocks noGrp="1"/>
+          </p:cNvSpPr>
+          <p:nvPr>
+            <p:ph type="title"/>
+          </p:nvPr>
+        </p:nvSpPr>
+        <p:spPr>
+          <a:xfrm>
+            <a:off x="132512" y="155223"/>
+            <a:ext cx="11919579" cy="834128"/>
+          </a:xfrm>
+        </p:spPr>
+        <p:txBody>
+          <a:bodyPr/>
+          <a:lstStyle/>
+          <a:p>
+            <a:pPr algn="l">
+              <a:tabLst>
+                <a:tab pos="2435225" algn="l"/>
+              </a:tabLst>
+            </a:pPr>
+            <a:r>
+              <a:rPr lang="en-GB" dirty="0"/>
+              <a:t>U_ZZ </a:t>
+            </a:r>
+          </a:p>
+        </p:txBody>
+      </p:sp>
+      <p:sp>
+        <p:nvSpPr>
+          <p:cNvPr id="3" name="Content Placeholder 2">
+            <a:extLst>
+              <a:ext uri="{FF2B5EF4-FFF2-40B4-BE49-F238E27FC236}">
+                <a16:creationId xmlns:a16="http://schemas.microsoft.com/office/drawing/2014/main" id="{438E9ED9-401E-6ADC-62E9-0CCC93294C14}"/>
+              </a:ext>
+            </a:extLst>
+          </p:cNvPr>
+          <p:cNvSpPr>
+            <a:spLocks noGrp="1"/>
+          </p:cNvSpPr>
+          <p:nvPr>
+            <p:ph idx="1"/>
+          </p:nvPr>
+        </p:nvSpPr>
+        <p:spPr>
+          <a:xfrm>
+            <a:off x="132512" y="1124262"/>
+            <a:ext cx="11919578" cy="5578515"/>
+          </a:xfrm>
+        </p:spPr>
+        <p:txBody>
+          <a:bodyPr/>
+          <a:lstStyle/>
+          <a:p>
+            <a:endParaRPr lang="en-GB" b="0" i="0" dirty="0">
+              <a:solidFill>
+                <a:schemeClr val="tx1"/>
+              </a:solidFill>
+              <a:effectLst/>
+              <a:latin typeface="Menlo" panose="020B0609030804020204" pitchFamily="49" charset="0"/>
+            </a:endParaRPr>
+          </a:p>
+          <a:p>
+            <a:r>
+              <a:rPr lang="en-GB" b="0" i="0" dirty="0">
+                <a:solidFill>
+                  <a:schemeClr val="tx1"/>
+                </a:solidFill>
+                <a:effectLst/>
+                <a:latin typeface="Menlo" panose="020B0609030804020204" pitchFamily="49" charset="0"/>
+              </a:rPr>
+              <a:t>Fidelity: </a:t>
+            </a:r>
+          </a:p>
+          <a:p>
+            <a:pPr marL="228600" lvl="1" indent="0">
+              <a:buNone/>
+            </a:pPr>
+            <a:r>
+              <a:rPr lang="en-GB" b="1" i="0" dirty="0">
+                <a:solidFill>
+                  <a:schemeClr val="tx1"/>
+                </a:solidFill>
+                <a:effectLst/>
+                <a:latin typeface="Menlo" panose="020B0609030804020204" pitchFamily="49" charset="0"/>
+              </a:rPr>
+              <a:t>0.999107</a:t>
+            </a:r>
+          </a:p>
+          <a:p>
+            <a:endParaRPr lang="en-GB" dirty="0">
+              <a:solidFill>
+                <a:schemeClr val="tx1"/>
+              </a:solidFill>
+              <a:latin typeface="Menlo" panose="020B0609030804020204" pitchFamily="49" charset="0"/>
+            </a:endParaRPr>
+          </a:p>
+          <a:p>
+            <a:r>
+              <a:rPr lang="en-GB" dirty="0">
+                <a:solidFill>
+                  <a:schemeClr val="tx1"/>
+                </a:solidFill>
+                <a:latin typeface="Menlo" panose="020B0609030804020204" pitchFamily="49" charset="0"/>
+              </a:rPr>
+              <a:t>Time: </a:t>
+            </a:r>
+          </a:p>
+          <a:p>
+            <a:pPr marL="0" indent="0">
+              <a:buNone/>
+            </a:pPr>
+            <a:r>
+              <a:rPr lang="en-GB" dirty="0">
+                <a:solidFill>
+                  <a:schemeClr val="tx1"/>
+                </a:solidFill>
+                <a:latin typeface="Menlo" panose="020B0609030804020204" pitchFamily="49" charset="0"/>
+              </a:rPr>
+              <a:t>  42 min</a:t>
+            </a:r>
+          </a:p>
+          <a:p>
+            <a:endParaRPr lang="en-GB" dirty="0">
+              <a:solidFill>
+                <a:schemeClr val="tx1"/>
+              </a:solidFill>
+              <a:latin typeface="Menlo" panose="020B0609030804020204" pitchFamily="49" charset="0"/>
+            </a:endParaRPr>
+          </a:p>
+          <a:p>
+            <a:r>
+              <a:rPr lang="en-GB" dirty="0">
+                <a:solidFill>
+                  <a:schemeClr val="tx1"/>
+                </a:solidFill>
+                <a:latin typeface="Menlo" panose="020B0609030804020204" pitchFamily="49" charset="0"/>
+              </a:rPr>
+              <a:t># params:</a:t>
+            </a:r>
+          </a:p>
+          <a:p>
+            <a:pPr marL="0" indent="0">
+              <a:buNone/>
+            </a:pPr>
+            <a:r>
+              <a:rPr lang="en-GB" dirty="0">
+                <a:solidFill>
+                  <a:schemeClr val="tx1"/>
+                </a:solidFill>
+                <a:latin typeface="Menlo" panose="020B0609030804020204" pitchFamily="49" charset="0"/>
+              </a:rPr>
+              <a:t>  54</a:t>
+            </a:r>
+            <a:endParaRPr lang="en-GB" dirty="0">
+              <a:solidFill>
+                <a:schemeClr val="tx1"/>
+              </a:solidFill>
+            </a:endParaRPr>
+          </a:p>
+          <a:p>
+            <a:pPr marL="0" indent="0">
+              <a:buNone/>
+            </a:pPr>
+            <a:endParaRPr lang="en-GB" dirty="0">
+              <a:solidFill>
+                <a:schemeClr val="tx1"/>
+              </a:solidFill>
+            </a:endParaRPr>
+          </a:p>
+        </p:txBody>
+      </p:sp>
+      <p:pic>
+        <p:nvPicPr>
+          <p:cNvPr id="4" name="Picture 3">
+            <a:extLst>
+              <a:ext uri="{FF2B5EF4-FFF2-40B4-BE49-F238E27FC236}">
+                <a16:creationId xmlns:a16="http://schemas.microsoft.com/office/drawing/2014/main" id="{0367EB02-78C6-C722-B667-B6FA63FF7E6C}"/>
+              </a:ext>
+            </a:extLst>
+          </p:cNvPr>
+          <p:cNvPicPr>
+            <a:picLocks noChangeAspect="1"/>
+          </p:cNvPicPr>
+          <p:nvPr/>
+        </p:nvPicPr>
+        <p:blipFill>
+          <a:blip r:embed="rId2"/>
+          <a:stretch>
+            <a:fillRect/>
+          </a:stretch>
+        </p:blipFill>
+        <p:spPr>
+          <a:xfrm>
+            <a:off x="2400300" y="1124262"/>
+            <a:ext cx="9651790" cy="5493454"/>
+          </a:xfrm>
+          <a:prstGeom prst="rect">
+            <a:avLst/>
+          </a:prstGeom>
+        </p:spPr>
+      </p:pic>
+    </p:spTree>
+    <p:extLst>
+      <p:ext uri="{BB962C8B-B14F-4D97-AF65-F5344CB8AC3E}">
+        <p14:creationId xmlns:p14="http://schemas.microsoft.com/office/powerpoint/2010/main" val="120925471"/>
+      </p:ext>
+    </p:extLst>
+  </p:cSld>
+  <p:clrMapOvr>
+    <a:masterClrMapping/>
+  </p:clrMapOvr>
+</p:sld>
+</file>
+
+<file path=ppt/slides/slide8.xml><?xml version="1.0" encoding="utf-8"?>
+<p:sld xmlns:a="http://schemas.openxmlformats.org/drawingml/2006/main" xmlns:r="http://schemas.openxmlformats.org/officeDocument/2006/relationships" xmlns:p="http://schemas.openxmlformats.org/presentationml/2006/main">
+  <p:cSld>
+    <p:spTree>
+      <p:nvGrpSpPr>
+        <p:cNvPr id="1" name=""/>
+        <p:cNvGrpSpPr/>
+        <p:nvPr/>
+      </p:nvGrpSpPr>
+      <p:grpSpPr>
+        <a:xfrm>
+          <a:off x="0" y="0"/>
+          <a:ext cx="0" cy="0"/>
+          <a:chOff x="0" y="0"/>
+          <a:chExt cx="0" cy="0"/>
+        </a:xfrm>
+      </p:grpSpPr>
+      <p:sp>
+        <p:nvSpPr>
+          <p:cNvPr id="2" name="Title 1">
+            <a:extLst>
+              <a:ext uri="{FF2B5EF4-FFF2-40B4-BE49-F238E27FC236}">
+                <a16:creationId xmlns:a16="http://schemas.microsoft.com/office/drawing/2014/main" id="{25EBC00B-3F13-4EDE-3CD5-C8C7900832EB}"/>
+              </a:ext>
+            </a:extLst>
+          </p:cNvPr>
+          <p:cNvSpPr>
+            <a:spLocks noGrp="1"/>
+          </p:cNvSpPr>
+          <p:nvPr>
+            <p:ph type="title"/>
+          </p:nvPr>
+        </p:nvSpPr>
+        <p:spPr>
+          <a:xfrm>
+            <a:off x="132512" y="155223"/>
+            <a:ext cx="11919579" cy="834128"/>
+          </a:xfrm>
+        </p:spPr>
+        <p:txBody>
+          <a:bodyPr/>
+          <a:lstStyle/>
+          <a:p>
+            <a:pPr algn="l">
+              <a:tabLst>
+                <a:tab pos="2435225" algn="l"/>
+              </a:tabLst>
+            </a:pPr>
+            <a:r>
+              <a:rPr lang="en-GB" dirty="0"/>
+              <a:t>Hadamard (electron)</a:t>
+            </a:r>
+          </a:p>
+        </p:txBody>
+      </p:sp>
+      <p:sp>
+        <p:nvSpPr>
+          <p:cNvPr id="3" name="Content Placeholder 2">
+            <a:extLst>
+              <a:ext uri="{FF2B5EF4-FFF2-40B4-BE49-F238E27FC236}">
+                <a16:creationId xmlns:a16="http://schemas.microsoft.com/office/drawing/2014/main" id="{438E9ED9-401E-6ADC-62E9-0CCC93294C14}"/>
+              </a:ext>
+            </a:extLst>
+          </p:cNvPr>
+          <p:cNvSpPr>
+            <a:spLocks noGrp="1"/>
+          </p:cNvSpPr>
+          <p:nvPr>
+            <p:ph idx="1"/>
+          </p:nvPr>
+        </p:nvSpPr>
+        <p:spPr>
+          <a:xfrm>
+            <a:off x="132512" y="1124262"/>
+            <a:ext cx="11919578" cy="5578515"/>
+          </a:xfrm>
+        </p:spPr>
+        <p:txBody>
+          <a:bodyPr/>
+          <a:lstStyle/>
+          <a:p>
+            <a:endParaRPr lang="en-GB" b="0" i="0" dirty="0">
+              <a:solidFill>
+                <a:schemeClr val="tx1"/>
+              </a:solidFill>
+              <a:effectLst/>
+              <a:latin typeface="Menlo" panose="020B0609030804020204" pitchFamily="49" charset="0"/>
+            </a:endParaRPr>
+          </a:p>
+          <a:p>
+            <a:r>
+              <a:rPr lang="en-GB" b="0" i="0" dirty="0">
+                <a:solidFill>
+                  <a:schemeClr val="tx1"/>
+                </a:solidFill>
+                <a:effectLst/>
+                <a:latin typeface="Menlo" panose="020B0609030804020204" pitchFamily="49" charset="0"/>
+              </a:rPr>
+              <a:t>Fidelity: </a:t>
+            </a:r>
+          </a:p>
+          <a:p>
+            <a:pPr marL="228600" lvl="1" indent="0">
+              <a:buNone/>
+            </a:pPr>
+            <a:r>
+              <a:rPr lang="en-DE" b="1" i="0" dirty="0">
+                <a:solidFill>
+                  <a:schemeClr val="tx1"/>
+                </a:solidFill>
+                <a:effectLst/>
+                <a:latin typeface="Menlo" panose="020B0609030804020204" pitchFamily="49" charset="0"/>
+              </a:rPr>
+              <a:t>0.7141/0.9991</a:t>
+            </a:r>
+            <a:endParaRPr lang="en-GB" b="1" i="0" dirty="0">
+              <a:solidFill>
+                <a:schemeClr val="tx1"/>
+              </a:solidFill>
+              <a:effectLst/>
+              <a:latin typeface="Menlo" panose="020B0609030804020204" pitchFamily="49" charset="0"/>
+            </a:endParaRPr>
+          </a:p>
+          <a:p>
+            <a:endParaRPr lang="en-GB" dirty="0">
+              <a:solidFill>
+                <a:schemeClr val="tx1"/>
+              </a:solidFill>
+              <a:latin typeface="Menlo" panose="020B0609030804020204" pitchFamily="49" charset="0"/>
+            </a:endParaRPr>
+          </a:p>
+          <a:p>
+            <a:r>
+              <a:rPr lang="en-GB" dirty="0">
+                <a:solidFill>
+                  <a:schemeClr val="tx1"/>
+                </a:solidFill>
+                <a:latin typeface="Menlo" panose="020B0609030804020204" pitchFamily="49" charset="0"/>
+              </a:rPr>
+              <a:t>Time: </a:t>
+            </a:r>
+          </a:p>
+          <a:p>
+            <a:pPr marL="0" indent="0">
+              <a:buNone/>
+            </a:pPr>
+            <a:r>
+              <a:rPr lang="en-GB" dirty="0">
+                <a:solidFill>
+                  <a:schemeClr val="tx1"/>
+                </a:solidFill>
+                <a:latin typeface="Menlo" panose="020B0609030804020204" pitchFamily="49" charset="0"/>
+              </a:rPr>
+              <a:t>  11/14 min</a:t>
+            </a:r>
+          </a:p>
+          <a:p>
+            <a:endParaRPr lang="en-GB" dirty="0">
+              <a:solidFill>
+                <a:schemeClr val="tx1"/>
+              </a:solidFill>
+              <a:latin typeface="Menlo" panose="020B0609030804020204" pitchFamily="49" charset="0"/>
+            </a:endParaRPr>
+          </a:p>
+          <a:p>
+            <a:r>
+              <a:rPr lang="en-GB" dirty="0">
+                <a:solidFill>
+                  <a:schemeClr val="tx1"/>
+                </a:solidFill>
+                <a:latin typeface="Menlo" panose="020B0609030804020204" pitchFamily="49" charset="0"/>
+              </a:rPr>
+              <a:t># params: 54</a:t>
+            </a:r>
+            <a:endParaRPr lang="en-GB" dirty="0">
+              <a:solidFill>
+                <a:schemeClr val="tx1"/>
+              </a:solidFill>
+            </a:endParaRPr>
+          </a:p>
+        </p:txBody>
+      </p:sp>
+      <p:pic>
+        <p:nvPicPr>
+          <p:cNvPr id="4" name="Picture 3">
+            <a:extLst>
+              <a:ext uri="{FF2B5EF4-FFF2-40B4-BE49-F238E27FC236}">
+                <a16:creationId xmlns:a16="http://schemas.microsoft.com/office/drawing/2014/main" id="{0367EB02-78C6-C722-B667-B6FA63FF7E6C}"/>
+              </a:ext>
+            </a:extLst>
+          </p:cNvPr>
+          <p:cNvPicPr>
+            <a:picLocks noChangeAspect="1"/>
+          </p:cNvPicPr>
+          <p:nvPr/>
+        </p:nvPicPr>
+        <p:blipFill>
+          <a:blip r:embed="rId2"/>
+          <a:srcRect/>
+          <a:stretch/>
+        </p:blipFill>
+        <p:spPr>
+          <a:xfrm>
+            <a:off x="0" y="4723958"/>
+            <a:ext cx="3713744" cy="2113730"/>
+          </a:xfrm>
+          <a:prstGeom prst="rect">
+            <a:avLst/>
+          </a:prstGeom>
+        </p:spPr>
+      </p:pic>
+      <p:pic>
+        <p:nvPicPr>
+          <p:cNvPr id="5" name="Picture 4">
+            <a:extLst>
+              <a:ext uri="{FF2B5EF4-FFF2-40B4-BE49-F238E27FC236}">
+                <a16:creationId xmlns:a16="http://schemas.microsoft.com/office/drawing/2014/main" id="{554CBF66-09B8-9658-62F9-9DBC16821CD7}"/>
+              </a:ext>
+            </a:extLst>
+          </p:cNvPr>
+          <p:cNvPicPr>
+            <a:picLocks noChangeAspect="1"/>
+          </p:cNvPicPr>
+          <p:nvPr/>
+        </p:nvPicPr>
+        <p:blipFill>
+          <a:blip r:embed="rId3"/>
+          <a:stretch>
+            <a:fillRect/>
+          </a:stretch>
+        </p:blipFill>
+        <p:spPr>
+          <a:xfrm>
+            <a:off x="3879691" y="1125175"/>
+            <a:ext cx="8179797" cy="4655648"/>
+          </a:xfrm>
+          <a:prstGeom prst="rect">
+            <a:avLst/>
+          </a:prstGeom>
+        </p:spPr>
+      </p:pic>
+    </p:spTree>
+    <p:extLst>
+      <p:ext uri="{BB962C8B-B14F-4D97-AF65-F5344CB8AC3E}">
+        <p14:creationId xmlns:p14="http://schemas.microsoft.com/office/powerpoint/2010/main" val="2690059367"/>
+      </p:ext>
+    </p:extLst>
+  </p:cSld>
+  <p:clrMapOvr>
+    <a:masterClrMapping/>
+  </p:clrMapOvr>
+</p:sld>
+</file>
+
+<file path=ppt/slides/slide9.xml><?xml version="1.0" encoding="utf-8"?>
+<p:sld xmlns:a="http://schemas.openxmlformats.org/drawingml/2006/main" xmlns:r="http://schemas.openxmlformats.org/officeDocument/2006/relationships" xmlns:p="http://schemas.openxmlformats.org/presentationml/2006/main">
+  <p:cSld>
+    <p:spTree>
+      <p:nvGrpSpPr>
+        <p:cNvPr id="1" name=""/>
+        <p:cNvGrpSpPr/>
+        <p:nvPr/>
+      </p:nvGrpSpPr>
+      <p:grpSpPr>
+        <a:xfrm>
+          <a:off x="0" y="0"/>
+          <a:ext cx="0" cy="0"/>
+          <a:chOff x="0" y="0"/>
+          <a:chExt cx="0" cy="0"/>
+        </a:xfrm>
+      </p:grpSpPr>
+      <p:sp>
+        <p:nvSpPr>
+          <p:cNvPr id="2" name="Title 1">
+            <a:extLst>
+              <a:ext uri="{FF2B5EF4-FFF2-40B4-BE49-F238E27FC236}">
+                <a16:creationId xmlns:a16="http://schemas.microsoft.com/office/drawing/2014/main" id="{25EBC00B-3F13-4EDE-3CD5-C8C7900832EB}"/>
+              </a:ext>
+            </a:extLst>
+          </p:cNvPr>
+          <p:cNvSpPr>
+            <a:spLocks noGrp="1"/>
+          </p:cNvSpPr>
+          <p:nvPr>
+            <p:ph type="title"/>
+          </p:nvPr>
+        </p:nvSpPr>
+        <p:spPr>
+          <a:xfrm>
+            <a:off x="132512" y="155223"/>
+            <a:ext cx="11919579" cy="834128"/>
+          </a:xfrm>
+        </p:spPr>
+        <p:txBody>
+          <a:bodyPr/>
+          <a:lstStyle/>
+          <a:p>
+            <a:pPr algn="l">
+              <a:tabLst>
+                <a:tab pos="2435225" algn="l"/>
+              </a:tabLst>
+            </a:pPr>
+            <a:r>
+              <a:rPr lang="en-GB" dirty="0"/>
+              <a:t>CNOT(1=&gt;2) </a:t>
+            </a:r>
+            <a:r>
+              <a:rPr lang="en-GB" sz="1800" dirty="0"/>
+              <a:t>x</a:t>
+            </a:r>
+            <a:r>
+              <a:rPr lang="en-GB" dirty="0"/>
+              <a:t> I</a:t>
+            </a:r>
+          </a:p>
+        </p:txBody>
+      </p:sp>
+      <p:pic>
+        <p:nvPicPr>
+          <p:cNvPr id="4" name="Content Placeholder 3">
+            <a:extLst>
+              <a:ext uri="{FF2B5EF4-FFF2-40B4-BE49-F238E27FC236}">
+                <a16:creationId xmlns:a16="http://schemas.microsoft.com/office/drawing/2014/main" id="{48809E1F-2A5A-C970-4DD8-8BBDAFC75BE9}"/>
+              </a:ext>
+            </a:extLst>
+          </p:cNvPr>
+          <p:cNvPicPr>
+            <a:picLocks noGrp="1" noChangeAspect="1"/>
+          </p:cNvPicPr>
+          <p:nvPr>
+            <p:ph idx="1"/>
+          </p:nvPr>
+        </p:nvPicPr>
+        <p:blipFill>
+          <a:blip r:embed="rId2"/>
+          <a:stretch>
+            <a:fillRect/>
+          </a:stretch>
+        </p:blipFill>
+        <p:spPr>
+          <a:xfrm>
+            <a:off x="2483556" y="1196623"/>
+            <a:ext cx="9568535" cy="5446068"/>
+          </a:xfrm>
+          <a:prstGeom prst="rect">
+            <a:avLst/>
+          </a:prstGeom>
+        </p:spPr>
+      </p:pic>
+      <p:sp>
+        <p:nvSpPr>
+          <p:cNvPr id="6" name="TextBox 5">
+            <a:extLst>
+              <a:ext uri="{FF2B5EF4-FFF2-40B4-BE49-F238E27FC236}">
+                <a16:creationId xmlns:a16="http://schemas.microsoft.com/office/drawing/2014/main" id="{CE4523DF-6FFE-3523-48D2-749630BA937C}"/>
+              </a:ext>
+            </a:extLst>
+          </p:cNvPr>
+          <p:cNvSpPr txBox="1"/>
+          <p:nvPr/>
+        </p:nvSpPr>
+        <p:spPr>
+          <a:xfrm>
+            <a:off x="132512" y="1196623"/>
+            <a:ext cx="3105779" cy="2585323"/>
+          </a:xfrm>
+          <a:prstGeom prst="rect">
+            <a:avLst/>
+          </a:prstGeom>
+          <a:noFill/>
+        </p:spPr>
+        <p:txBody>
+          <a:bodyPr wrap="square" rtlCol="0">
+            <a:spAutoFit/>
+          </a:bodyPr>
+          <a:lstStyle/>
+          <a:p>
+            <a:endParaRPr lang="en-GB" b="0" i="0" dirty="0">
+              <a:solidFill>
+                <a:schemeClr val="tx1"/>
+              </a:solidFill>
+              <a:effectLst/>
+              <a:latin typeface="Menlo" panose="020B0609030804020204" pitchFamily="49" charset="0"/>
+            </a:endParaRPr>
+          </a:p>
+          <a:p>
+            <a:r>
+              <a:rPr lang="en-GB" b="0" i="0" dirty="0">
+                <a:solidFill>
+                  <a:schemeClr val="tx1"/>
+                </a:solidFill>
+                <a:effectLst/>
+                <a:latin typeface="Menlo" panose="020B0609030804020204" pitchFamily="49" charset="0"/>
+              </a:rPr>
+              <a:t>Fidelity: </a:t>
+            </a:r>
+          </a:p>
+          <a:p>
+            <a:pPr marL="228600" lvl="1" indent="0">
+              <a:buNone/>
+            </a:pPr>
+            <a:r>
+              <a:rPr lang="en-DE" b="1" i="0" dirty="0">
+                <a:solidFill>
+                  <a:schemeClr val="tx1"/>
+                </a:solidFill>
+                <a:effectLst/>
+                <a:latin typeface="Menlo" panose="020B0609030804020204" pitchFamily="49" charset="0"/>
+              </a:rPr>
+              <a:t>0.99894</a:t>
+            </a:r>
+            <a:endParaRPr lang="en-GB" b="1" i="0" dirty="0">
+              <a:solidFill>
+                <a:schemeClr val="tx1"/>
+              </a:solidFill>
+              <a:effectLst/>
+              <a:latin typeface="Menlo" panose="020B0609030804020204" pitchFamily="49" charset="0"/>
+            </a:endParaRPr>
+          </a:p>
+          <a:p>
+            <a:endParaRPr lang="en-GB" dirty="0">
+              <a:solidFill>
+                <a:schemeClr val="tx1"/>
+              </a:solidFill>
+              <a:latin typeface="Menlo" panose="020B0609030804020204" pitchFamily="49" charset="0"/>
+            </a:endParaRPr>
+          </a:p>
+          <a:p>
+            <a:r>
+              <a:rPr lang="en-GB" dirty="0">
+                <a:solidFill>
+                  <a:schemeClr val="tx1"/>
+                </a:solidFill>
+                <a:latin typeface="Menlo" panose="020B0609030804020204" pitchFamily="49" charset="0"/>
+              </a:rPr>
+              <a:t>Time: </a:t>
+            </a:r>
+          </a:p>
+          <a:p>
+            <a:pPr marL="0" indent="0">
+              <a:buNone/>
+            </a:pPr>
+            <a:r>
+              <a:rPr lang="en-GB" dirty="0">
+                <a:solidFill>
+                  <a:schemeClr val="tx1"/>
+                </a:solidFill>
+                <a:latin typeface="Menlo" panose="020B0609030804020204" pitchFamily="49" charset="0"/>
+              </a:rPr>
+              <a:t>  78 min</a:t>
+            </a:r>
+          </a:p>
+          <a:p>
+            <a:endParaRPr lang="en-GB" dirty="0">
+              <a:solidFill>
+                <a:schemeClr val="tx1"/>
+              </a:solidFill>
+              <a:latin typeface="Menlo" panose="020B0609030804020204" pitchFamily="49" charset="0"/>
+            </a:endParaRPr>
+          </a:p>
+          <a:p>
+            <a:r>
+              <a:rPr lang="en-GB" dirty="0">
+                <a:solidFill>
+                  <a:schemeClr val="tx1"/>
+                </a:solidFill>
+                <a:latin typeface="Menlo" panose="020B0609030804020204" pitchFamily="49" charset="0"/>
+              </a:rPr>
+              <a:t># params:</a:t>
+            </a:r>
+          </a:p>
+          <a:p>
+            <a:pPr marL="0" indent="0">
+              <a:buNone/>
+            </a:pPr>
+            <a:r>
+              <a:rPr lang="en-GB" dirty="0">
+                <a:solidFill>
+                  <a:schemeClr val="tx1"/>
+                </a:solidFill>
+                <a:latin typeface="Menlo" panose="020B0609030804020204" pitchFamily="49" charset="0"/>
+              </a:rPr>
+              <a:t>  54</a:t>
+            </a:r>
+            <a:endParaRPr lang="en-GB" dirty="0">
+              <a:solidFill>
+                <a:schemeClr val="tx1"/>
+              </a:solidFill>
+            </a:endParaRPr>
+          </a:p>
+        </p:txBody>
+      </p:sp>
+    </p:spTree>
+    <p:extLst>
+      <p:ext uri="{BB962C8B-B14F-4D97-AF65-F5344CB8AC3E}">
+        <p14:creationId xmlns:p14="http://schemas.microsoft.com/office/powerpoint/2010/main" val="2071496410"/>
       </p:ext>
     </p:extLst>
   </p:cSld>
